--- a/Curso Gas B/17 - Gas a la primera (guia practica NEDGIA)/17 - Gas a la primera (guia practica NEDGIA) - Vídeo 1.pptx
+++ b/Curso Gas B/17 - Gas a la primera (guia practica NEDGIA)/17 - Gas a la primera (guia practica NEDGIA) - Vídeo 1.pptx
@@ -21,6 +21,7 @@
     <p:sldId id="269" r:id="rId21"/>
     <p:sldId id="270" r:id="rId22"/>
     <p:sldId id="271" r:id="rId23"/>
+    <p:sldId id="272" r:id="rId24"/>
   </p:sldIdLst>
   <p:sldSz cx="12191695" cy="6858000" type="screen4x3"/>
   <p:notesSz cx="6858000" cy="9144000"/>
@@ -592,12 +593,12 @@
           <a:lstStyle/>
           <a:p>
             <a:r>
-              <a:t>N1: ¿Y por qué en vivienda la altura baja a un metro setenta?</a:t>
-            </a:r>
-          </a:p>
-          <a:p>
-            <a:r>
-              <a:t>N2: Aquí hay un detalle de examen que confunde a mucha gente: hay dos alturas de totalizador. En centralizado el máximo son dos metros, dos con cuarenta en prefabricado con escalera. Pero cuando el contador va dentro de la vivienda, baja a un metro setenta. ¿La razón? Dentro de casa no hay una escalera de servicio; lo tiene que leer cómodamente el propio usuario, de pie, sin subirse a nada. Truco para recordarlo: centralizado dos metros, en vivienda uno setenta. Y otra regla de oro: nunca pongas el contador bajo la proyección del fregadero o de una pila, porque un goteo de agua encima del contador y sus conexiones te trae humedad, corrosión y falsas fugas. Agua y gas conviven mal. Colócalo cerca de la entrada, ventilado y a la vista.</a:t>
+              <a:t>N1: ¿Qué es eso de la válvula de máxima de rearme manual?</a:t>
+            </a:r>
+          </a:p>
+          <a:p>
+            <a:r>
+              <a:t>N2: Piensa en ella como un fusible de presión. Si la red te manda un golpe de presión más alto de lo previsto, esta válvula corta el gas de golpe; y ojo, no se vuelve a abrir sola, hay que rearmarla a mano, para que un técnico vaya, mire qué ha pasado y luego reponga. ¿Cuándo es obligatoria? Cuando la presión de entrada al regulador es de ciento cincuenta milibares o más. Por debajo no hace falta; por encima, sí o sí. El conjunto de regulación se puede montar dentro del recinto de contadores, pero con grado dos de accesibilidad y cuidando que el recinto sea estanco respecto al edificio, para que ante una fuga ventile directamente a la calle. Y si el regulador va fuera, siempre protegido de la lluvia, que el agua lo corroe y lo bloquea.</a:t>
             </a:r>
           </a:p>
         </p:txBody>
@@ -667,12 +668,12 @@
           <a:lstStyle/>
           <a:p>
             <a:r>
-              <a:t>N1: Me lío con los 40 y los 20 centímetros. ¿Cómo los distingo?</a:t>
-            </a:r>
-          </a:p>
-          <a:p>
-            <a:r>
-              <a:t>N2: Es normal liarse, así que vamos a fijarlos con lógica. Los cuarenta centímetros son la distancia al quemador de la cocina, o sea al fuego directo. Los veinte centímetros son la distancia a aparatos de gas y a mecanismos eléctricos, como el interruptor de la luz o una caldera. ¿Por qué a lo eléctrico? Porque un interruptor al accionarse hace una chispa, y una chispa junto a una conexión que rezuma gas es como empiezan los sustos. Y ojo a un matiz que cae: ese veinte es en todo el perímetro del aparato, no solo a los lados; nada de colgar el contador justo encima de la caldera. ¿Que no llegas a la distancia porque la cocina es pequeña? Pues montas una pantalla de protección entre medias y solucionado.</a:t>
+              <a:t>N1: ¿Y por qué en vivienda la altura baja a un metro setenta?</a:t>
+            </a:r>
+          </a:p>
+          <a:p>
+            <a:r>
+              <a:t>N2: Aquí hay un detalle de examen que confunde a mucha gente: hay dos alturas de totalizador. En centralizado el máximo son dos metros, dos con cuarenta en prefabricado con escalera. Pero cuando el contador va dentro de la vivienda, baja a un metro setenta. ¿La razón? Dentro de casa no hay una escalera de servicio; lo tiene que leer cómodamente el propio usuario, de pie, sin subirse a nada. Truco para recordarlo: centralizado dos metros, en vivienda uno setenta. Y otra regla de oro: nunca pongas el contador bajo la proyección del fregadero o de una pila, porque un goteo de agua encima del contador y sus conexiones te trae humedad, corrosión y falsas fugas. Agua y gas conviven mal. Colócalo cerca de la entrada, ventilado y a la vista.</a:t>
             </a:r>
           </a:p>
         </p:txBody>
@@ -742,12 +743,12 @@
           <a:lstStyle/>
           <a:p>
             <a:r>
-              <a:t>N1: ¿Qué tienen en común esos sitios prohibidos?</a:t>
-            </a:r>
-          </a:p>
-          <a:p>
-            <a:r>
-              <a:t>N2: Todos son locales donde te encierras con la puerta cerrada y donde no hay ventilación garantizada. En un dormitorio duermes; en el baño o la ducha te metes con la puerta cerrada y a veces con vapor. Si en cualquiera de esos sitios hubiera una fuga, el gas se acumula sin que te enteres y acabas en una intoxicación. Por eso el contador no va nunca en dormitorio, water, cuarto de baño ni cuarto de ducha. Es la misma filosofía que ya llevamos: al gas hay que darle aire y sitios donde una fuga se note y se ventile, no rincones cerrados donde se quede escondido.</a:t>
+              <a:t>N1: Me lío con los 40 y los 20 centímetros. ¿Cómo los distingo?</a:t>
+            </a:r>
+          </a:p>
+          <a:p>
+            <a:r>
+              <a:t>N2: Es normal liarse, así que vamos a fijarlos con lógica. Los cuarenta centímetros son la distancia al quemador de la cocina, o sea al fuego directo. Los veinte centímetros son la distancia a aparatos de gas y a mecanismos eléctricos, como el interruptor de la luz o una caldera. ¿Por qué a lo eléctrico? Porque un interruptor al accionarse hace una chispa, y una chispa junto a una conexión que rezuma gas es como empiezan los sustos. Y ojo a un matiz que cae: ese veinte es en todo el perímetro del aparato, no solo a los lados; nada de colgar el contador justo encima de la caldera. ¿Que no llegas a la distancia porque la cocina es pequeña? Pues montas una pantalla de protección entre medias y solucionado.</a:t>
             </a:r>
           </a:p>
         </p:txBody>
@@ -817,12 +818,12 @@
           <a:lstStyle/>
           <a:p>
             <a:r>
-              <a:t>N1: ¿Cómo memorizo los tres grados sin hacerme un lío?</a:t>
-            </a:r>
-          </a:p>
-          <a:p>
-            <a:r>
-              <a:t>N2: Memorízalos por lo que te estorba para llegar a la llave, de menos a más. Grado uno: llegas andando, a mano, sin cerraduras y sin escaleras; es el más fácil, el de la llave que abre el propio usuario. Grado dos: ya hay una cerradura normalizada de por medio, pero sigues llegando sin escalera; es el típico armario cerrado con llave de compañía. Grado tres: el más difícil, necesitas una escalera o un medio mecánico, o tienes que pasar por una zona privada para llegar. Cuanto mayor es el número, más barreras. Con esta regla colocas cualquier llave de las tablas: primero piensa qué te estorba para alcanzarla, y el grado sale solo.</a:t>
+              <a:t>N1: ¿Qué tienen en común esos sitios prohibidos?</a:t>
+            </a:r>
+          </a:p>
+          <a:p>
+            <a:r>
+              <a:t>N2: Todos son locales donde te encierras con la puerta cerrada y donde no hay ventilación garantizada. En un dormitorio duermes; en el baño o la ducha te metes con la puerta cerrada y a veces con vapor. Si en cualquiera de esos sitios hubiera una fuga, el gas se acumula sin que te enteres y acabas en una intoxicación. Por eso el contador no va nunca en dormitorio, water, cuarto de baño ni cuarto de ducha. Es la misma filosofía que ya llevamos: al gas hay que darle aire y sitios donde una fuga se note y se ventile, no rincones cerrados donde se quede escondido.</a:t>
             </a:r>
           </a:p>
         </p:txBody>
@@ -892,12 +893,12 @@
           <a:lstStyle/>
           <a:p>
             <a:r>
-              <a:t>N1: ¿Por qué insisten tanto en que la llave de usuario sea accesible para la distribuidora?</a:t>
-            </a:r>
-          </a:p>
-          <a:p>
-            <a:r>
-              <a:t>N2: Porque esa llave es la que permite dejar sin gas una vivienda concreta en una emergencia. La llave de usuario se pone siempre, para aislar cada instalación individual, y tiene que ser fácilmente accesible con grado dos para la empresa distribuidora, desde la zona común o desde el límite de la propiedad. Piénsalo: si la escondes dentro de la vivienda y no hay nadie, la compañía no puede cortar el suministro cuando hay peligro, y eso es una anomalía. Un detalle fino que cae: existe el obturador de cierre, un tapón de seguridad que la distribuidora puede exigir, con grado tres y solo para ella; pero si montas contadores de funciones añadidas, los de telemedida y telecorte, el obturador no se monta, porque el propio contador ya hace esa función a distancia.</a:t>
+              <a:t>N1: ¿Cómo memorizo los tres grados sin hacerme un lío?</a:t>
+            </a:r>
+          </a:p>
+          <a:p>
+            <a:r>
+              <a:t>N2: Memorízalos por lo que te estorba para llegar a la llave, de menos a más. Grado uno: llegas andando, a mano, sin cerraduras y sin escaleras; es el más fácil, el de la llave que abre el propio usuario. Grado dos: ya hay una cerradura normalizada de por medio, pero sigues llegando sin escalera; es el típico armario cerrado con llave de compañía. Grado tres: el más difícil, necesitas una escalera o un medio mecánico, o tienes que pasar por una zona privada para llegar. Cuanto mayor es el número, más barreras. Con esta regla colocas cualquier llave de las tablas: primero piensa qué te estorba para alcanzarla, y el grado sale solo.</a:t>
             </a:r>
           </a:p>
         </p:txBody>
@@ -967,12 +968,12 @@
           <a:lstStyle/>
           <a:p>
             <a:r>
-              <a:t>N1: Las tablas de la comunitaria y la individual tienen muchas filas. ¿Hay un patrón?</a:t>
-            </a:r>
-          </a:p>
-          <a:p>
-            <a:r>
-              <a:t>N2: Sí, y en cuanto lo ves ya no necesitas empollar fila por fila. Fíjate: todo lo que la distribuidora necesita tocar, la acometida, la llave de edificio, la de montante, los contadores, la regulación y la llave de usuario, vive en zona comunitaria o pública y pide grado dos o tres. En cambio, todo lo que maneja el usuario dentro de su propia vivienda, la llave de vivienda, la del aparato, la del regulador, es grado uno, a mano y sin llave. Así que ante cualquier llave, primero decide dos cosas: quién la usa y dónde está. Con eso el grado casi se contesta solo. Y todo esto queda reflejado en el certificado de instalación, el boletín que firma la empresa instaladora y entrega a la distribuidora.</a:t>
+              <a:t>N1: ¿Por qué insisten tanto en que la llave de usuario sea accesible para la distribuidora?</a:t>
+            </a:r>
+          </a:p>
+          <a:p>
+            <a:r>
+              <a:t>N2: Porque esa llave es la que permite dejar sin gas una vivienda concreta en una emergencia. La llave de usuario se pone siempre, para aislar cada instalación individual, y tiene que ser fácilmente accesible con grado dos para la empresa distribuidora, desde la zona común o desde el límite de la propiedad. Piénsalo: si la escondes dentro de la vivienda y no hay nadie, la compañía no puede cortar el suministro cuando hay peligro, y eso es una anomalía. Un detalle fino que cae: existe el obturador de cierre, un tapón de seguridad que la distribuidora puede exigir, con grado tres y solo para ella; pero si montas contadores de funciones añadidas, los de telemedida y telecorte, el obturador no se monta, porque el propio contador ya hace esa función a distancia.</a:t>
             </a:r>
           </a:p>
         </p:txBody>
@@ -1042,6 +1043,81 @@
           <a:lstStyle/>
           <a:p>
             <a:r>
+              <a:t>N1: Las tablas de la comunitaria y la individual tienen muchas filas. ¿Hay un patrón?</a:t>
+            </a:r>
+          </a:p>
+          <a:p>
+            <a:r>
+              <a:t>N2: Sí, y en cuanto lo ves ya no necesitas empollar fila por fila. Fíjate: todo lo que la distribuidora necesita tocar, la acometida, la llave de edificio, la de montante, los contadores, la regulación y la llave de usuario, vive en zona comunitaria o pública y pide grado dos o tres. En cambio, todo lo que maneja el usuario dentro de su propia vivienda, la llave de vivienda, la del aparato, la del regulador, es grado uno, a mano y sin llave. Así que ante cualquier llave, primero decide dos cosas: quién la usa y dónde está. Con eso el grado casi se contesta solo. Y todo esto queda reflejado en el certificado de instalación, el boletín que firma la empresa instaladora y entrega a la distribuidora.</a:t>
+            </a:r>
+          </a:p>
+        </p:txBody>
+      </p:sp>
+      <p:sp>
+        <p:nvSpPr>
+          <p:cNvPr id="4" name="Slide Number Placeholder 3"/>
+          <p:cNvSpPr>
+            <a:spLocks noGrp="1"/>
+          </p:cNvSpPr>
+          <p:nvPr>
+            <p:ph type="sldNum" idx="5" sz="quarter"/>
+          </p:nvPr>
+        </p:nvSpPr>
+        <p:spPr/>
+      </p:sp>
+    </p:spTree>
+  </p:cSld>
+  <p:clrMapOvr>
+    <a:masterClrMapping/>
+  </p:clrMapOvr>
+</p:notes>
+</file>
+
+<file path=ppt/notesSlides/notesSlide17.xml><?xml version="1.0" encoding="utf-8"?>
+<p:notes xmlns:a="http://schemas.openxmlformats.org/drawingml/2006/main" xmlns:p="http://schemas.openxmlformats.org/presentationml/2006/main" xmlns:r="http://schemas.openxmlformats.org/officeDocument/2006/relationships">
+  <p:cSld>
+    <p:spTree>
+      <p:nvGrpSpPr>
+        <p:cNvPr id="1" name=""/>
+        <p:cNvGrpSpPr/>
+        <p:nvPr/>
+      </p:nvGrpSpPr>
+      <p:grpSpPr>
+        <a:xfrm>
+          <a:off x="0" y="0"/>
+          <a:ext cx="0" cy="0"/>
+          <a:chOff x="0" y="0"/>
+          <a:chExt cx="0" cy="0"/>
+        </a:xfrm>
+      </p:grpSpPr>
+      <p:sp>
+        <p:nvSpPr>
+          <p:cNvPr id="2" name="Slide Image Placeholder 1"/>
+          <p:cNvSpPr>
+            <a:spLocks noGrp="1"/>
+          </p:cNvSpPr>
+          <p:nvPr>
+            <p:ph type="sldImg" idx="2"/>
+          </p:nvPr>
+        </p:nvSpPr>
+        <p:spPr/>
+      </p:sp>
+      <p:sp>
+        <p:nvSpPr>
+          <p:cNvPr id="3" name="Notes Placeholder 2"/>
+          <p:cNvSpPr>
+            <a:spLocks noGrp="1"/>
+          </p:cNvSpPr>
+          <p:nvPr>
+            <p:ph type="body" idx="3" sz="quarter"/>
+          </p:nvPr>
+        </p:nvSpPr>
+        <p:spPr/>
+        <p:txBody>
+          <a:bodyPr/>
+          <a:lstStyle/>
+          <a:p>
+            <a:r>
               <a:t>N1: Cerramos fuerte. Si me quedo con lo esencial de este vídeo, ¿qué es?</a:t>
             </a:r>
           </a:p>
@@ -1190,16 +1266,7 @@
         <p:txBody>
           <a:bodyPr/>
           <a:lstStyle/>
-          <a:p>
-            <a:r>
-              <a:t>N1: ¿Por qué no puedo bajar los contadores a un segundo sótano si me sobra sitio?</a:t>
-            </a:r>
-          </a:p>
-          <a:p>
-            <a:r>
-              <a:t>N2: Esto se entiende con física de andar por casa. El gas natural pesa menos que el aire, así que si se escapa, sube, no baja. Si metes la batería de contadores en un pozo profundo, una fuga se queda ahí abajo estancada, sin salida hacia arriba, y eso es peligrosísimo. Por eso la norma es tajante: en edificio nuevo se centraliza sí o sí, en zona comunitaria, con acceso de grado dos, o sea tras una cerradura normalizada, y nunca por debajo del primer sótano. Regla para todo el tema: gas ligero, cuanto más alto mejor, jamás en un agujero. Y ese recinto es solo para gas: como te encuentren cajas o una bombona de otro uso, es anomalía en la inspección.</a:t>
-            </a:r>
-          </a:p>
+          <a:p/>
         </p:txBody>
       </p:sp>
       <p:sp>
@@ -1267,12 +1334,12 @@
           <a:lstStyle/>
           <a:p>
             <a:r>
-              <a:t>N1: ¿Qué es el totalizador y por qué importa tanto su altura?</a:t>
-            </a:r>
-          </a:p>
-          <a:p>
-            <a:r>
-              <a:t>N2: El totalizador es la ventanita del contador donde se lee el consumo, los numeritos que marcan cuánto gas ha pasado. La altura importa por algo muy práctico: si lo pones demasiado alto, el que va a leer no llega, y el que va a mantener tampoco puede trabajar. Piénsalo como el cuadro de la luz de casa: tiene que estar a la vista y a mano, no encaramado en el techo. Por eso en centralizado la norma pide el totalizador por debajo de dos metros. Solo en módulos prefabricados, los de la norma UNE sesenta mil cuatrocientos noventa, se admite hasta dos metros con cuarenta, pero con una condición: que dejes una escalera o un útil para leer. Si lo dejas alto y sin acceso, llegan las lecturas estimadas y las reclamaciones de factura.</a:t>
+              <a:t>N1: ¿Por qué no puedo bajar los contadores a un segundo sótano si me sobra sitio?</a:t>
+            </a:r>
+          </a:p>
+          <a:p>
+            <a:r>
+              <a:t>N2: Esto se entiende con física de andar por casa. El gas natural pesa menos que el aire, así que si se escapa, sube, no baja. Si metes la batería de contadores en un pozo profundo, una fuga se queda ahí abajo estancada, sin salida hacia arriba, y eso es peligrosísimo. Por eso la norma es tajante: en edificio nuevo se centraliza sí o sí, en zona comunitaria, con acceso de grado dos, o sea tras una cerradura normalizada, y nunca por debajo del primer sótano. Regla para todo el tema: gas ligero, cuanto más alto mejor, jamás en un agujero. Y ese recinto es solo para gas: como te encuentren cajas o una bombona de otro uso, es anomalía en la inspección.</a:t>
             </a:r>
           </a:p>
         </p:txBody>
@@ -1342,12 +1409,12 @@
           <a:lstStyle/>
           <a:p>
             <a:r>
-              <a:t>N1: ¿Por qué tanto detalle con la puerta del recinto?</a:t>
-            </a:r>
-          </a:p>
-          <a:p>
-            <a:r>
-              <a:t>N2: Es puro sentido común de seguridad, y por eso cae tanto. Imagina que estás dentro del recinto y de repente hueles a gas o hay un susto. Tienes que poder salir de un empujón, sin buscar una llave. Por eso la puerta abre hacia fuera y, si es un local, se abre siempre desde dentro sin llave. Además, que abra hacia fuera ayuda a que la fuerza de una posible explosión no la selle contra el marco. Junta esto con otros dos detalles: una toma de corriente en los locales técnicos, para poder trabajar con luz y herramienta, y el cartel de «Contadores de gas» en la parte de fuera de la puerta, para que cualquiera sepa qué hay ahí. Puerta, enchufe y cartel: los tres que más se preguntan.</a:t>
+              <a:t>N1: ¿Qué es el totalizador y por qué importa tanto su altura?</a:t>
+            </a:r>
+          </a:p>
+          <a:p>
+            <a:r>
+              <a:t>N2: El totalizador es la ventanita del contador donde se lee el consumo, los numeritos que marcan cuánto gas ha pasado. La altura importa por algo muy práctico: si lo pones demasiado alto, el que va a leer no llega, y el que va a mantener tampoco puede trabajar. Piénsalo como el cuadro de la luz de casa: tiene que estar a la vista y a mano, no encaramado en el techo. Por eso en centralizado la norma pide el totalizador por debajo de dos metros. Solo en módulos prefabricados, los de la norma UNE sesenta mil cuatrocientos noventa, se admite hasta dos metros con cuarenta, pero con una condición: que dejes una escalera o un útil para leer. Si lo dejas alto y sin acceso, llegan las lecturas estimadas y las reclamaciones de factura.</a:t>
             </a:r>
           </a:p>
         </p:txBody>
@@ -1417,12 +1484,12 @@
           <a:lstStyle/>
           <a:p>
             <a:r>
-              <a:t>N1: ¿Puede pasar por el recinto de contadores una tubería que no sea de gas?</a:t>
-            </a:r>
-          </a:p>
-          <a:p>
-            <a:r>
-              <a:t>N2: La norma prefiere que no. El recinto es solo para gas, así que hay que evitar que una conducción ajena, de agua, de electricidad, de lo que sea, discurra vista por dentro. ¿Y si no queda más remedio que atraviese? Entonces esa conducción tiene que ir sin accesorios ni juntas desmontables por dentro del recinto, y los puntos por donde entra y sale deben quedar estancos; si es un tubo de plástico, además envainado. La idea es que nada ajeno pueda soltar algo dentro ni abrir un camino por donde el gas se cuele a otra parte. Y un detalle: las conducciones eléctricas vistas van dentro de una vaina continua de acero, y toda la instalación eléctrica del recinto cumple el reglamento de baja tensión. Cuanto más limpio y solo para gas, mejor.</a:t>
+              <a:t>N1: ¿Por qué tanto detalle con la puerta del recinto?</a:t>
+            </a:r>
+          </a:p>
+          <a:p>
+            <a:r>
+              <a:t>N2: Es puro sentido común de seguridad, y por eso cae tanto. Imagina que estás dentro del recinto y de repente hueles a gas o hay un susto. Tienes que poder salir de un empujón, sin buscar una llave. Por eso la puerta abre hacia fuera y, si es un local, se abre siempre desde dentro sin llave. Además, que abra hacia fuera ayuda a que la fuerza de una posible explosión no la selle contra el marco. Junta esto con otros dos detalles: una toma de corriente en los locales técnicos, para poder trabajar con luz y herramienta, y el cartel de «Contadores de gas» en la parte de fuera de la puerta, para que cualquiera sepa qué hay ahí. Puerta, enchufe y cartel: los tres que más se preguntan.</a:t>
             </a:r>
           </a:p>
         </p:txBody>
@@ -1492,12 +1559,12 @@
           <a:lstStyle/>
           <a:p>
             <a:r>
-              <a:t>N1: ¿Qué diferencia hay entre ventilación directa e indirecta?</a:t>
-            </a:r>
-          </a:p>
-          <a:p>
-            <a:r>
-              <a:t>N2: Muy fácil. Ventilación directa es cuando el aire del recinto sale al exterior de un tirón, sin escalas. Ventilación indirecta es cuando antes pasa por otro local que sí está ventilado. ¿Y por qué en un primer sótano con gas ligero se prohíbe la indirecta? Porque no quieres que el gas de una fuga se pasee por otra estancia de la casa antes de salir a la calle; podría acumularse por el camino. Prefieres que salga fuera directo, sin rodeos. Es la misma filosofía de todo el tema: al gas natural, que es más ligero que el aire, dale una salida limpia hacia arriba y hacia fuera, cuanto más corta mejor.</a:t>
+              <a:t>N1: ¿Puede pasar por el recinto de contadores una tubería que no sea de gas?</a:t>
+            </a:r>
+          </a:p>
+          <a:p>
+            <a:r>
+              <a:t>N2: La norma prefiere que no. El recinto es solo para gas, así que hay que evitar que una conducción ajena, de agua, de electricidad, de lo que sea, discurra vista por dentro. ¿Y si no queda más remedio que atraviese? Entonces esa conducción tiene que ir sin accesorios ni juntas desmontables por dentro del recinto, y los puntos por donde entra y sale deben quedar estancos; si es un tubo de plástico, además envainado. La idea es que nada ajeno pueda soltar algo dentro ni abrir un camino por donde el gas se cuele a otra parte. Y un detalle: las conducciones eléctricas vistas van dentro de una vaina continua de acero, y toda la instalación eléctrica del recinto cumple el reglamento de baja tensión. Cuanto más limpio y solo para gas, mejor.</a:t>
             </a:r>
           </a:p>
         </p:txBody>
@@ -1567,12 +1634,12 @@
           <a:lstStyle/>
           <a:p>
             <a:r>
-              <a:t>N1: Hay una tabla enorme de secciones. ¿Me la tengo que aprender de memoria?</a:t>
-            </a:r>
-          </a:p>
-          <a:p>
-            <a:r>
-              <a:t>N2: No te agobies con la tabla celda a celda; quédate con la lógica y la sacas sola. Ventilar el recinto sirve para que, si hay una microfuga, el gas se airee y no se acumule; si te quedas corto de rejilla, conviertes el recinto en una bolsa de gas. La idea: los armarios son pequeños y cerrados, así que piden secciones pequeñas, entre cinco y cincuenta centímetros cuadrados, y no admiten ventilación indirecta. Los locales y cuartos, más grandes, piden doscientos centímetros cuadrados arriba y abajo, o ciento cincuenta si hay muchos contadores. Y hay dos recargos del cincuenta por ciento: cuando el conducto es largo y cuando estás en un primer sótano, que además exige puerta estanca. Con eso respondes casi cualquier casilla.</a:t>
+              <a:t>N1: ¿Qué diferencia hay entre ventilación directa e indirecta?</a:t>
+            </a:r>
+          </a:p>
+          <a:p>
+            <a:r>
+              <a:t>N2: Muy fácil. Ventilación directa es cuando el aire del recinto sale al exterior de un tirón, sin escalas. Ventilación indirecta es cuando antes pasa por otro local que sí está ventilado. ¿Y por qué en un primer sótano con gas ligero se prohíbe la indirecta? Porque no quieres que el gas de una fuga se pasee por otra estancia de la casa antes de salir a la calle; podría acumularse por el camino. Prefieres que salga fuera directo, sin rodeos. Es la misma filosofía de todo el tema: al gas natural, que es más ligero que el aire, dale una salida limpia hacia arriba y hacia fuera, cuanto más corta mejor.</a:t>
             </a:r>
           </a:p>
         </p:txBody>
@@ -1642,12 +1709,12 @@
           <a:lstStyle/>
           <a:p>
             <a:r>
-              <a:t>N1: ¿Qué es eso de la válvula de máxima de rearme manual?</a:t>
-            </a:r>
-          </a:p>
-          <a:p>
-            <a:r>
-              <a:t>N2: Piensa en ella como un fusible de presión. Si la red te manda un golpe de presión más alto de lo previsto, esta válvula corta el gas de golpe; y ojo, no se vuelve a abrir sola, hay que rearmarla a mano, para que un técnico vaya, mire qué ha pasado y luego reponga. ¿Cuándo es obligatoria? Cuando la presión de entrada al regulador es de ciento cincuenta milibares o más. Por debajo no hace falta; por encima, sí o sí. El conjunto de regulación se puede montar dentro del recinto de contadores, pero con grado dos de accesibilidad y cuidando que el recinto sea estanco respecto al edificio, para que ante una fuga ventile directamente a la calle. Y si el regulador va fuera, siempre protegido de la lluvia, que el agua lo corroe y lo bloquea.</a:t>
+              <a:t>N1: Hay una tabla enorme de secciones. ¿Me la tengo que aprender de memoria?</a:t>
+            </a:r>
+          </a:p>
+          <a:p>
+            <a:r>
+              <a:t>N2: No te agobies con la tabla celda a celda; quédate con la lógica y la sacas sola. Ventilar el recinto sirve para que, si hay una microfuga, el gas se airee y no se acumule; si te quedas corto de rejilla, conviertes el recinto en una bolsa de gas. La idea: los armarios son pequeños y cerrados, así que piden secciones pequeñas, entre cinco y cincuenta centímetros cuadrados, y no admiten ventilación indirecta. Los locales y cuartos, más grandes, piden doscientos centímetros cuadrados arriba y abajo, o ciento cincuenta si hay muchos contadores. Y hay dos recargos del cincuenta por ciento: cuando el conducto es largo y cuando estás en un primer sótano, que además exige puerta estanca. Con eso respondes casi cualquier casilla.</a:t>
             </a:r>
           </a:p>
         </p:txBody>
@@ -4722,7 +4789,7 @@
             <a:r>
               <a:rPr sz="1400" b="1" i="0">
                 <a:solidFill>
-                  <a:srgbClr val="CADCFC"/>
+                  <a:srgbClr val="F4A24C"/>
                 </a:solidFill>
                 <a:latin typeface="Montserrat"/>
               </a:rPr>
@@ -4733,13 +4800,57 @@
       </p:sp>
       <p:sp>
         <p:nvSpPr>
-          <p:cNvPr id="4" name="TextBox 3"/>
+          <p:cNvPr id="4" name="Rounded Rectangle 3"/>
+          <p:cNvSpPr/>
+          <p:nvPr/>
+        </p:nvSpPr>
+        <p:spPr>
+          <a:xfrm>
+            <a:off x="868680" y="2057400"/>
+            <a:ext cx="1463040" cy="82296"/>
+          </a:xfrm>
+          <a:prstGeom prst="roundRect">
+            <a:avLst/>
+          </a:prstGeom>
+          <a:solidFill>
+            <a:srgbClr val="E8801A"/>
+          </a:solidFill>
+          <a:ln>
+            <a:noFill/>
+          </a:ln>
+          <a:effectLst/>
+        </p:spPr>
+        <p:style>
+          <a:lnRef idx="1">
+            <a:schemeClr val="accent1"/>
+          </a:lnRef>
+          <a:fillRef idx="3">
+            <a:schemeClr val="accent1"/>
+          </a:fillRef>
+          <a:effectRef idx="2">
+            <a:schemeClr val="accent1"/>
+          </a:effectRef>
+          <a:fontRef idx="minor">
+            <a:schemeClr val="lt1"/>
+          </a:fontRef>
+        </p:style>
+        <p:txBody>
+          <a:bodyPr rtlCol="0" anchor="ctr"/>
+          <a:lstStyle/>
+          <a:p>
+            <a:pPr algn="ctr"/>
+          </a:p>
+        </p:txBody>
+      </p:sp>
+      <p:sp>
+        <p:nvSpPr>
+          <p:cNvPr id="5" name="TextBox 4"/>
           <p:cNvSpPr txBox="1"/>
           <p:nvPr/>
         </p:nvSpPr>
         <p:spPr>
           <a:xfrm>
-            <a:off x="822960" y="2194560"/>
+            <a:off x="822960" y="2286000"/>
             <a:ext cx="10515600" cy="2011680"/>
           </a:xfrm>
           <a:prstGeom prst="rect">
@@ -4778,7 +4889,7 @@
       </p:sp>
       <p:sp>
         <p:nvSpPr>
-          <p:cNvPr id="5" name="TextBox 4"/>
+          <p:cNvPr id="6" name="TextBox 5"/>
           <p:cNvSpPr txBox="1"/>
           <p:nvPr/>
         </p:nvSpPr>
@@ -4902,7 +5013,7 @@
                 </a:solidFill>
                 <a:latin typeface="Montserrat"/>
               </a:rPr>
-              <a:t>010 / 016</a:t>
+              <a:t>010 / 017</a:t>
             </a:r>
           </a:p>
         </p:txBody>
@@ -4950,7 +5061,7 @@
         <p:spPr>
           <a:xfrm>
             <a:off x="822960" y="457200"/>
-            <a:ext cx="8229600" cy="365760"/>
+            <a:ext cx="10058400" cy="365760"/>
           </a:xfrm>
           <a:prstGeom prst="rect">
             <a:avLst/>
@@ -4964,13 +5075,13 @@
           <a:lstStyle/>
           <a:p>
             <a:r>
-              <a:rPr sz="1200" b="1" i="0">
-                <a:solidFill>
-                  <a:srgbClr val="64748B"/>
-                </a:solidFill>
-                <a:latin typeface="Montserrat"/>
-              </a:rPr>
-              <a:t>CONTADORES EN VIVIENDA</a:t>
+              <a:rPr sz="1300" b="1" i="0">
+                <a:solidFill>
+                  <a:srgbClr val="E8801A"/>
+                </a:solidFill>
+                <a:latin typeface="Montserrat"/>
+              </a:rPr>
+              <a:t>CONJUNTOS DE REGULACIÓN</a:t>
             </a:r>
           </a:p>
         </p:txBody>
@@ -4998,26 +5109,70 @@
           <a:lstStyle/>
           <a:p>
             <a:r>
-              <a:rPr sz="2700" b="1" i="0">
+              <a:rPr sz="2800" b="1" i="0">
                 <a:solidFill>
                   <a:srgbClr val="1E2761"/>
                 </a:solidFill>
                 <a:latin typeface="Montserrat"/>
               </a:rPr>
-              <a:t>Si no se centraliza, va en la vivienda</a:t>
-            </a:r>
-          </a:p>
-        </p:txBody>
-      </p:sp>
-      <p:sp>
-        <p:nvSpPr>
-          <p:cNvPr id="7" name="TextBox 6"/>
+              <a:t>Regulador: grado 2 y válvula de máxima</a:t>
+            </a:r>
+          </a:p>
+        </p:txBody>
+      </p:sp>
+      <p:sp>
+        <p:nvSpPr>
+          <p:cNvPr id="7" name="Rounded Rectangle 6"/>
+          <p:cNvSpPr/>
+          <p:nvPr/>
+        </p:nvSpPr>
+        <p:spPr>
+          <a:xfrm>
+            <a:off x="868680" y="1627632"/>
+            <a:ext cx="2011680" cy="73152"/>
+          </a:xfrm>
+          <a:prstGeom prst="roundRect">
+            <a:avLst/>
+          </a:prstGeom>
+          <a:solidFill>
+            <a:srgbClr val="E8801A"/>
+          </a:solidFill>
+          <a:ln>
+            <a:noFill/>
+          </a:ln>
+          <a:effectLst/>
+        </p:spPr>
+        <p:style>
+          <a:lnRef idx="1">
+            <a:schemeClr val="accent1"/>
+          </a:lnRef>
+          <a:fillRef idx="3">
+            <a:schemeClr val="accent1"/>
+          </a:fillRef>
+          <a:effectRef idx="2">
+            <a:schemeClr val="accent1"/>
+          </a:effectRef>
+          <a:fontRef idx="minor">
+            <a:schemeClr val="lt1"/>
+          </a:fontRef>
+        </p:style>
+        <p:txBody>
+          <a:bodyPr rtlCol="0" anchor="ctr"/>
+          <a:lstStyle/>
+          <a:p>
+            <a:pPr algn="ctr"/>
+          </a:p>
+        </p:txBody>
+      </p:sp>
+      <p:sp>
+        <p:nvSpPr>
+          <p:cNvPr id="8" name="TextBox 7"/>
           <p:cNvSpPr txBox="1"/>
           <p:nvPr/>
         </p:nvSpPr>
         <p:spPr>
           <a:xfrm>
-            <a:off x="822960" y="1920240"/>
+            <a:off x="822960" y="1965960"/>
             <a:ext cx="4983480" cy="4206240"/>
           </a:xfrm>
           <a:prstGeom prst="rect">
@@ -5033,17 +5188,17 @@
           <a:p>
             <a:pPr>
               <a:spcAft>
-                <a:spcPts val="1000"/>
+                <a:spcPts val="1100"/>
               </a:spcAft>
             </a:pPr>
             <a:r>
               <a:rPr sz="1600" b="1" i="0">
                 <a:solidFill>
-                  <a:srgbClr val="2E3A80"/>
-                </a:solidFill>
-                <a:latin typeface="Montserrat"/>
-              </a:rPr>
-              <a:t>•  </a:t>
+                  <a:srgbClr val="E8801A"/>
+                </a:solidFill>
+                <a:latin typeface="Montserrat"/>
+              </a:rPr>
+              <a:t>▸  </a:t>
             </a:r>
             <a:r>
               <a:rPr sz="1600" b="0" i="0">
@@ -5052,23 +5207,23 @@
                 </a:solidFill>
                 <a:latin typeface="Montserrat"/>
               </a:rPr>
-              <a:t>Solo en edificios ya construidos</a:t>
+              <a:t>Regulación grado 2, dentro del recinto</a:t>
             </a:r>
           </a:p>
           <a:p>
             <a:pPr>
               <a:spcAft>
-                <a:spcPts val="1000"/>
+                <a:spcPts val="1100"/>
               </a:spcAft>
             </a:pPr>
             <a:r>
               <a:rPr sz="1600" b="1" i="0">
                 <a:solidFill>
-                  <a:srgbClr val="2E3A80"/>
-                </a:solidFill>
-                <a:latin typeface="Montserrat"/>
-              </a:rPr>
-              <a:t>•  </a:t>
+                  <a:srgbClr val="E8801A"/>
+                </a:solidFill>
+                <a:latin typeface="Montserrat"/>
+              </a:rPr>
+              <a:t>▸  </a:t>
             </a:r>
             <a:r>
               <a:rPr sz="1600" b="0" i="0">
@@ -5077,23 +5232,23 @@
                 </a:solidFill>
                 <a:latin typeface="Montserrat"/>
               </a:rPr>
-              <a:t>Cerca de la entrada, ventilado</a:t>
+              <a:t>Recinto estanco, ventila al exterior</a:t>
             </a:r>
           </a:p>
           <a:p>
             <a:pPr>
               <a:spcAft>
-                <a:spcPts val="1000"/>
+                <a:spcPts val="1100"/>
               </a:spcAft>
             </a:pPr>
             <a:r>
               <a:rPr sz="1600" b="1" i="0">
                 <a:solidFill>
-                  <a:srgbClr val="2E3A80"/>
-                </a:solidFill>
-                <a:latin typeface="Montserrat"/>
-              </a:rPr>
-              <a:t>•  </a:t>
+                  <a:srgbClr val="E8801A"/>
+                </a:solidFill>
+                <a:latin typeface="Montserrat"/>
+              </a:rPr>
+              <a:t>▸  </a:t>
             </a:r>
             <a:r>
               <a:rPr sz="1600" b="0" i="0">
@@ -5102,23 +5257,23 @@
                 </a:solidFill>
                 <a:latin typeface="Montserrat"/>
               </a:rPr>
-              <a:t>Totalizador a 1,7 m como máximo</a:t>
+              <a:t>Entrada ≥ 150 mbar → válvula de máxima</a:t>
             </a:r>
           </a:p>
           <a:p>
             <a:pPr>
               <a:spcAft>
-                <a:spcPts val="1000"/>
+                <a:spcPts val="1100"/>
               </a:spcAft>
             </a:pPr>
             <a:r>
               <a:rPr sz="1600" b="1" i="0">
                 <a:solidFill>
-                  <a:srgbClr val="2E3A80"/>
-                </a:solidFill>
-                <a:latin typeface="Montserrat"/>
-              </a:rPr>
-              <a:t>•  </a:t>
+                  <a:srgbClr val="E8801A"/>
+                </a:solidFill>
+                <a:latin typeface="Montserrat"/>
+              </a:rPr>
+              <a:t>▸  </a:t>
             </a:r>
             <a:r>
               <a:rPr sz="1600" b="0" i="0">
@@ -5127,14 +5282,14 @@
                 </a:solidFill>
                 <a:latin typeface="Montserrat"/>
               </a:rPr>
-              <a:t>Nunca bajo el fregadero</a:t>
-            </a:r>
-          </a:p>
-        </p:txBody>
-      </p:sp>
-      <p:sp>
-        <p:nvSpPr>
-          <p:cNvPr id="8" name="imgph" descr="IMGQ:gas meter inside kitchen apartment"/>
+              <a:t>Regulador exterior: protegido de la lluvia</a:t>
+            </a:r>
+          </a:p>
+        </p:txBody>
+      </p:sp>
+      <p:sp>
+        <p:nvSpPr>
+          <p:cNvPr id="9" name="imgph" descr="IMGQ:gas pressure regulator on pipe"/>
           <p:cNvSpPr/>
           <p:nvPr/>
         </p:nvSpPr>
@@ -5180,7 +5335,7 @@
       </p:sp>
       <p:sp>
         <p:nvSpPr>
-          <p:cNvPr id="9" name="TextBox 8"/>
+          <p:cNvPr id="10" name="TextBox 9"/>
           <p:cNvSpPr txBox="1"/>
           <p:nvPr/>
         </p:nvSpPr>
@@ -5220,7 +5375,7 @@
                 </a:solidFill>
                 <a:latin typeface="Montserrat"/>
               </a:rPr>
-              <a:t>gas meter inside kitchen apartment</a:t>
+              <a:t>gas pressure regulator on pipe</a:t>
             </a:r>
           </a:p>
         </p:txBody>
@@ -5317,7 +5472,7 @@
                 </a:solidFill>
                 <a:latin typeface="Montserrat"/>
               </a:rPr>
-              <a:t>011 / 016</a:t>
+              <a:t>011 / 017</a:t>
             </a:r>
           </a:p>
         </p:txBody>
@@ -5365,7 +5520,7 @@
         <p:spPr>
           <a:xfrm>
             <a:off x="822960" y="457200"/>
-            <a:ext cx="8229600" cy="365760"/>
+            <a:ext cx="10058400" cy="365760"/>
           </a:xfrm>
           <a:prstGeom prst="rect">
             <a:avLst/>
@@ -5379,13 +5534,13 @@
           <a:lstStyle/>
           <a:p>
             <a:r>
-              <a:rPr sz="1200" b="1" i="0">
-                <a:solidFill>
-                  <a:srgbClr val="64748B"/>
-                </a:solidFill>
-                <a:latin typeface="Montserrat"/>
-              </a:rPr>
-              <a:t>CONTADOR EN VIVIENDA</a:t>
+              <a:rPr sz="1300" b="1" i="0">
+                <a:solidFill>
+                  <a:srgbClr val="E8801A"/>
+                </a:solidFill>
+                <a:latin typeface="Montserrat"/>
+              </a:rPr>
+              <a:t>CONTADORES EN VIVIENDA</a:t>
             </a:r>
           </a:p>
         </p:txBody>
@@ -5413,26 +5568,70 @@
           <a:lstStyle/>
           <a:p>
             <a:r>
-              <a:rPr sz="2700" b="1" i="0">
+              <a:rPr sz="2800" b="1" i="0">
                 <a:solidFill>
                   <a:srgbClr val="1E2761"/>
                 </a:solidFill>
                 <a:latin typeface="Montserrat"/>
               </a:rPr>
-              <a:t>40 al fuego, 20 a lo eléctrico</a:t>
-            </a:r>
-          </a:p>
-        </p:txBody>
-      </p:sp>
-      <p:sp>
-        <p:nvSpPr>
-          <p:cNvPr id="7" name="TextBox 6"/>
+              <a:t>Si no se centraliza, va en la vivienda</a:t>
+            </a:r>
+          </a:p>
+        </p:txBody>
+      </p:sp>
+      <p:sp>
+        <p:nvSpPr>
+          <p:cNvPr id="7" name="Rounded Rectangle 6"/>
+          <p:cNvSpPr/>
+          <p:nvPr/>
+        </p:nvSpPr>
+        <p:spPr>
+          <a:xfrm>
+            <a:off x="868680" y="1627632"/>
+            <a:ext cx="2011680" cy="73152"/>
+          </a:xfrm>
+          <a:prstGeom prst="roundRect">
+            <a:avLst/>
+          </a:prstGeom>
+          <a:solidFill>
+            <a:srgbClr val="E8801A"/>
+          </a:solidFill>
+          <a:ln>
+            <a:noFill/>
+          </a:ln>
+          <a:effectLst/>
+        </p:spPr>
+        <p:style>
+          <a:lnRef idx="1">
+            <a:schemeClr val="accent1"/>
+          </a:lnRef>
+          <a:fillRef idx="3">
+            <a:schemeClr val="accent1"/>
+          </a:fillRef>
+          <a:effectRef idx="2">
+            <a:schemeClr val="accent1"/>
+          </a:effectRef>
+          <a:fontRef idx="minor">
+            <a:schemeClr val="lt1"/>
+          </a:fontRef>
+        </p:style>
+        <p:txBody>
+          <a:bodyPr rtlCol="0" anchor="ctr"/>
+          <a:lstStyle/>
+          <a:p>
+            <a:pPr algn="ctr"/>
+          </a:p>
+        </p:txBody>
+      </p:sp>
+      <p:sp>
+        <p:nvSpPr>
+          <p:cNvPr id="8" name="TextBox 7"/>
           <p:cNvSpPr txBox="1"/>
           <p:nvPr/>
         </p:nvSpPr>
         <p:spPr>
           <a:xfrm>
-            <a:off x="822960" y="1920240"/>
+            <a:off x="822960" y="1965960"/>
             <a:ext cx="4983480" cy="4206240"/>
           </a:xfrm>
           <a:prstGeom prst="rect">
@@ -5448,17 +5647,17 @@
           <a:p>
             <a:pPr>
               <a:spcAft>
-                <a:spcPts val="1000"/>
+                <a:spcPts val="1100"/>
               </a:spcAft>
             </a:pPr>
             <a:r>
               <a:rPr sz="1600" b="1" i="0">
                 <a:solidFill>
-                  <a:srgbClr val="2E3A80"/>
-                </a:solidFill>
-                <a:latin typeface="Montserrat"/>
-              </a:rPr>
-              <a:t>•  </a:t>
+                  <a:srgbClr val="E8801A"/>
+                </a:solidFill>
+                <a:latin typeface="Montserrat"/>
+              </a:rPr>
+              <a:t>▸  </a:t>
             </a:r>
             <a:r>
               <a:rPr sz="1600" b="0" i="0">
@@ -5467,23 +5666,23 @@
                 </a:solidFill>
                 <a:latin typeface="Montserrat"/>
               </a:rPr>
-              <a:t>≥ 40 cm al quemador de cocina</a:t>
+              <a:t>Solo en edificios ya construidos</a:t>
             </a:r>
           </a:p>
           <a:p>
             <a:pPr>
               <a:spcAft>
-                <a:spcPts val="1000"/>
+                <a:spcPts val="1100"/>
               </a:spcAft>
             </a:pPr>
             <a:r>
               <a:rPr sz="1600" b="1" i="0">
                 <a:solidFill>
-                  <a:srgbClr val="2E3A80"/>
-                </a:solidFill>
-                <a:latin typeface="Montserrat"/>
-              </a:rPr>
-              <a:t>•  </a:t>
+                  <a:srgbClr val="E8801A"/>
+                </a:solidFill>
+                <a:latin typeface="Montserrat"/>
+              </a:rPr>
+              <a:t>▸  </a:t>
             </a:r>
             <a:r>
               <a:rPr sz="1600" b="0" i="0">
@@ -5492,23 +5691,23 @@
                 </a:solidFill>
                 <a:latin typeface="Montserrat"/>
               </a:rPr>
-              <a:t>≥ 20 cm a aparatos y mecanismos eléctricos</a:t>
+              <a:t>Cerca de la entrada, ventilado</a:t>
             </a:r>
           </a:p>
           <a:p>
             <a:pPr>
               <a:spcAft>
-                <a:spcPts val="1000"/>
+                <a:spcPts val="1100"/>
               </a:spcAft>
             </a:pPr>
             <a:r>
               <a:rPr sz="1600" b="1" i="0">
                 <a:solidFill>
-                  <a:srgbClr val="2E3A80"/>
-                </a:solidFill>
-                <a:latin typeface="Montserrat"/>
-              </a:rPr>
-              <a:t>•  </a:t>
+                  <a:srgbClr val="E8801A"/>
+                </a:solidFill>
+                <a:latin typeface="Montserrat"/>
+              </a:rPr>
+              <a:t>▸  </a:t>
             </a:r>
             <a:r>
               <a:rPr sz="1600" b="0" i="0">
@@ -5517,23 +5716,23 @@
                 </a:solidFill>
                 <a:latin typeface="Montserrat"/>
               </a:rPr>
-              <a:t>20 cm en todo el perímetro</a:t>
+              <a:t>Totalizador a 1,7 m como máximo</a:t>
             </a:r>
           </a:p>
           <a:p>
             <a:pPr>
               <a:spcAft>
-                <a:spcPts val="1000"/>
+                <a:spcPts val="1100"/>
               </a:spcAft>
             </a:pPr>
             <a:r>
               <a:rPr sz="1600" b="1" i="0">
                 <a:solidFill>
-                  <a:srgbClr val="2E3A80"/>
-                </a:solidFill>
-                <a:latin typeface="Montserrat"/>
-              </a:rPr>
-              <a:t>•  </a:t>
+                  <a:srgbClr val="E8801A"/>
+                </a:solidFill>
+                <a:latin typeface="Montserrat"/>
+              </a:rPr>
+              <a:t>▸  </a:t>
             </a:r>
             <a:r>
               <a:rPr sz="1600" b="0" i="0">
@@ -5542,14 +5741,14 @@
                 </a:solidFill>
                 <a:latin typeface="Montserrat"/>
               </a:rPr>
-              <a:t>Si no llegas: pantalla de protección</a:t>
-            </a:r>
-          </a:p>
-        </p:txBody>
-      </p:sp>
-      <p:sp>
-        <p:nvSpPr>
-          <p:cNvPr id="8" name="imgph" descr="IMGQ:kitchen gas stove burner blue flame"/>
+              <a:t>Nunca bajo el fregadero</a:t>
+            </a:r>
+          </a:p>
+        </p:txBody>
+      </p:sp>
+      <p:sp>
+        <p:nvSpPr>
+          <p:cNvPr id="9" name="imgph" descr="IMGQ:gas meter inside kitchen apartment"/>
           <p:cNvSpPr/>
           <p:nvPr/>
         </p:nvSpPr>
@@ -5595,7 +5794,7 @@
       </p:sp>
       <p:sp>
         <p:nvSpPr>
-          <p:cNvPr id="9" name="TextBox 8"/>
+          <p:cNvPr id="10" name="TextBox 9"/>
           <p:cNvSpPr txBox="1"/>
           <p:nvPr/>
         </p:nvSpPr>
@@ -5635,7 +5834,7 @@
                 </a:solidFill>
                 <a:latin typeface="Montserrat"/>
               </a:rPr>
-              <a:t>kitchen gas stove burner blue flame</a:t>
+              <a:t>gas meter inside kitchen apartment</a:t>
             </a:r>
           </a:p>
         </p:txBody>
@@ -5732,7 +5931,7 @@
                 </a:solidFill>
                 <a:latin typeface="Montserrat"/>
               </a:rPr>
-              <a:t>012 / 016</a:t>
+              <a:t>012 / 017</a:t>
             </a:r>
           </a:p>
         </p:txBody>
@@ -5780,7 +5979,7 @@
         <p:spPr>
           <a:xfrm>
             <a:off x="822960" y="457200"/>
-            <a:ext cx="8229600" cy="365760"/>
+            <a:ext cx="10058400" cy="365760"/>
           </a:xfrm>
           <a:prstGeom prst="rect">
             <a:avLst/>
@@ -5794,9 +5993,9 @@
           <a:lstStyle/>
           <a:p>
             <a:r>
-              <a:rPr sz="1200" b="1" i="0">
-                <a:solidFill>
-                  <a:srgbClr val="64748B"/>
+              <a:rPr sz="1300" b="1" i="0">
+                <a:solidFill>
+                  <a:srgbClr val="E8801A"/>
                 </a:solidFill>
                 <a:latin typeface="Montserrat"/>
               </a:rPr>
@@ -5828,26 +6027,70 @@
           <a:lstStyle/>
           <a:p>
             <a:r>
-              <a:rPr sz="2700" b="1" i="0">
+              <a:rPr sz="2800" b="1" i="0">
                 <a:solidFill>
                   <a:srgbClr val="1E2761"/>
                 </a:solidFill>
                 <a:latin typeface="Montserrat"/>
               </a:rPr>
-              <a:t>Dónde no va nunca el contador</a:t>
-            </a:r>
-          </a:p>
-        </p:txBody>
-      </p:sp>
-      <p:sp>
-        <p:nvSpPr>
-          <p:cNvPr id="7" name="TextBox 6"/>
+              <a:t>40 al fuego, 20 a lo eléctrico</a:t>
+            </a:r>
+          </a:p>
+        </p:txBody>
+      </p:sp>
+      <p:sp>
+        <p:nvSpPr>
+          <p:cNvPr id="7" name="Rounded Rectangle 6"/>
+          <p:cNvSpPr/>
+          <p:nvPr/>
+        </p:nvSpPr>
+        <p:spPr>
+          <a:xfrm>
+            <a:off x="868680" y="1627632"/>
+            <a:ext cx="2011680" cy="73152"/>
+          </a:xfrm>
+          <a:prstGeom prst="roundRect">
+            <a:avLst/>
+          </a:prstGeom>
+          <a:solidFill>
+            <a:srgbClr val="E8801A"/>
+          </a:solidFill>
+          <a:ln>
+            <a:noFill/>
+          </a:ln>
+          <a:effectLst/>
+        </p:spPr>
+        <p:style>
+          <a:lnRef idx="1">
+            <a:schemeClr val="accent1"/>
+          </a:lnRef>
+          <a:fillRef idx="3">
+            <a:schemeClr val="accent1"/>
+          </a:fillRef>
+          <a:effectRef idx="2">
+            <a:schemeClr val="accent1"/>
+          </a:effectRef>
+          <a:fontRef idx="minor">
+            <a:schemeClr val="lt1"/>
+          </a:fontRef>
+        </p:style>
+        <p:txBody>
+          <a:bodyPr rtlCol="0" anchor="ctr"/>
+          <a:lstStyle/>
+          <a:p>
+            <a:pPr algn="ctr"/>
+          </a:p>
+        </p:txBody>
+      </p:sp>
+      <p:sp>
+        <p:nvSpPr>
+          <p:cNvPr id="8" name="TextBox 7"/>
           <p:cNvSpPr txBox="1"/>
           <p:nvPr/>
         </p:nvSpPr>
         <p:spPr>
           <a:xfrm>
-            <a:off x="822960" y="1920240"/>
+            <a:off x="822960" y="1965960"/>
             <a:ext cx="4983480" cy="4206240"/>
           </a:xfrm>
           <a:prstGeom prst="rect">
@@ -5863,17 +6106,17 @@
           <a:p>
             <a:pPr>
               <a:spcAft>
-                <a:spcPts val="1000"/>
+                <a:spcPts val="1100"/>
               </a:spcAft>
             </a:pPr>
             <a:r>
               <a:rPr sz="1600" b="1" i="0">
                 <a:solidFill>
-                  <a:srgbClr val="2E3A80"/>
-                </a:solidFill>
-                <a:latin typeface="Montserrat"/>
-              </a:rPr>
-              <a:t>•  </a:t>
+                  <a:srgbClr val="E8801A"/>
+                </a:solidFill>
+                <a:latin typeface="Montserrat"/>
+              </a:rPr>
+              <a:t>▸  </a:t>
             </a:r>
             <a:r>
               <a:rPr sz="1600" b="0" i="0">
@@ -5882,23 +6125,23 @@
                 </a:solidFill>
                 <a:latin typeface="Montserrat"/>
               </a:rPr>
-              <a:t>En el dormitorio, no</a:t>
+              <a:t>≥ 40 cm al quemador de cocina</a:t>
             </a:r>
           </a:p>
           <a:p>
             <a:pPr>
               <a:spcAft>
-                <a:spcPts val="1000"/>
+                <a:spcPts val="1100"/>
               </a:spcAft>
             </a:pPr>
             <a:r>
               <a:rPr sz="1600" b="1" i="0">
                 <a:solidFill>
-                  <a:srgbClr val="2E3A80"/>
-                </a:solidFill>
-                <a:latin typeface="Montserrat"/>
-              </a:rPr>
-              <a:t>•  </a:t>
+                  <a:srgbClr val="E8801A"/>
+                </a:solidFill>
+                <a:latin typeface="Montserrat"/>
+              </a:rPr>
+              <a:t>▸  </a:t>
             </a:r>
             <a:r>
               <a:rPr sz="1600" b="0" i="0">
@@ -5907,23 +6150,23 @@
                 </a:solidFill>
                 <a:latin typeface="Montserrat"/>
               </a:rPr>
-              <a:t>En el W.C., no</a:t>
+              <a:t>≥ 20 cm a aparatos y mecanismos eléctricos</a:t>
             </a:r>
           </a:p>
           <a:p>
             <a:pPr>
               <a:spcAft>
-                <a:spcPts val="1000"/>
+                <a:spcPts val="1100"/>
               </a:spcAft>
             </a:pPr>
             <a:r>
               <a:rPr sz="1600" b="1" i="0">
                 <a:solidFill>
-                  <a:srgbClr val="2E3A80"/>
-                </a:solidFill>
-                <a:latin typeface="Montserrat"/>
-              </a:rPr>
-              <a:t>•  </a:t>
+                  <a:srgbClr val="E8801A"/>
+                </a:solidFill>
+                <a:latin typeface="Montserrat"/>
+              </a:rPr>
+              <a:t>▸  </a:t>
             </a:r>
             <a:r>
               <a:rPr sz="1600" b="0" i="0">
@@ -5932,23 +6175,23 @@
                 </a:solidFill>
                 <a:latin typeface="Montserrat"/>
               </a:rPr>
-              <a:t>En el cuarto de baño, no</a:t>
+              <a:t>20 cm en todo el perímetro</a:t>
             </a:r>
           </a:p>
           <a:p>
             <a:pPr>
               <a:spcAft>
-                <a:spcPts val="1000"/>
+                <a:spcPts val="1100"/>
               </a:spcAft>
             </a:pPr>
             <a:r>
               <a:rPr sz="1600" b="1" i="0">
                 <a:solidFill>
-                  <a:srgbClr val="2E3A80"/>
-                </a:solidFill>
-                <a:latin typeface="Montserrat"/>
-              </a:rPr>
-              <a:t>•  </a:t>
+                  <a:srgbClr val="E8801A"/>
+                </a:solidFill>
+                <a:latin typeface="Montserrat"/>
+              </a:rPr>
+              <a:t>▸  </a:t>
             </a:r>
             <a:r>
               <a:rPr sz="1600" b="0" i="0">
@@ -5957,14 +6200,14 @@
                 </a:solidFill>
                 <a:latin typeface="Montserrat"/>
               </a:rPr>
-              <a:t>En el cuarto de ducha, no</a:t>
-            </a:r>
-          </a:p>
-        </p:txBody>
-      </p:sp>
-      <p:sp>
-        <p:nvSpPr>
-          <p:cNvPr id="8" name="imgph" descr="IMGQ:closed bathroom door interior"/>
+              <a:t>Si no llegas: pantalla de protección</a:t>
+            </a:r>
+          </a:p>
+        </p:txBody>
+      </p:sp>
+      <p:sp>
+        <p:nvSpPr>
+          <p:cNvPr id="9" name="imgph" descr="IMGQ:kitchen gas stove burner blue flame"/>
           <p:cNvSpPr/>
           <p:nvPr/>
         </p:nvSpPr>
@@ -6010,7 +6253,7 @@
       </p:sp>
       <p:sp>
         <p:nvSpPr>
-          <p:cNvPr id="9" name="TextBox 8"/>
+          <p:cNvPr id="10" name="TextBox 9"/>
           <p:cNvSpPr txBox="1"/>
           <p:nvPr/>
         </p:nvSpPr>
@@ -6050,7 +6293,7 @@
                 </a:solidFill>
                 <a:latin typeface="Montserrat"/>
               </a:rPr>
-              <a:t>closed bathroom door interior</a:t>
+              <a:t>kitchen gas stove burner blue flame</a:t>
             </a:r>
           </a:p>
         </p:txBody>
@@ -6147,7 +6390,7 @@
                 </a:solidFill>
                 <a:latin typeface="Montserrat"/>
               </a:rPr>
-              <a:t>013 / 016</a:t>
+              <a:t>013 / 017</a:t>
             </a:r>
           </a:p>
         </p:txBody>
@@ -6195,7 +6438,7 @@
         <p:spPr>
           <a:xfrm>
             <a:off x="822960" y="457200"/>
-            <a:ext cx="8229600" cy="365760"/>
+            <a:ext cx="10058400" cy="365760"/>
           </a:xfrm>
           <a:prstGeom prst="rect">
             <a:avLst/>
@@ -6209,13 +6452,13 @@
           <a:lstStyle/>
           <a:p>
             <a:r>
-              <a:rPr sz="1200" b="1" i="0">
-                <a:solidFill>
-                  <a:srgbClr val="64748B"/>
-                </a:solidFill>
-                <a:latin typeface="Montserrat"/>
-              </a:rPr>
-              <a:t>ACCESIBILIDAD · UNE 60670-2</a:t>
+              <a:rPr sz="1300" b="1" i="0">
+                <a:solidFill>
+                  <a:srgbClr val="E8801A"/>
+                </a:solidFill>
+                <a:latin typeface="Montserrat"/>
+              </a:rPr>
+              <a:t>CONTADOR EN VIVIENDA</a:t>
             </a:r>
           </a:p>
         </p:txBody>
@@ -6243,26 +6486,70 @@
           <a:lstStyle/>
           <a:p>
             <a:r>
-              <a:rPr sz="2700" b="1" i="0">
+              <a:rPr sz="2800" b="1" i="0">
                 <a:solidFill>
                   <a:srgbClr val="1E2761"/>
                 </a:solidFill>
                 <a:latin typeface="Montserrat"/>
               </a:rPr>
-              <a:t>Los tres grados de accesibilidad</a:t>
-            </a:r>
-          </a:p>
-        </p:txBody>
-      </p:sp>
-      <p:sp>
-        <p:nvSpPr>
-          <p:cNvPr id="7" name="TextBox 6"/>
+              <a:t>Dónde no va nunca el contador</a:t>
+            </a:r>
+          </a:p>
+        </p:txBody>
+      </p:sp>
+      <p:sp>
+        <p:nvSpPr>
+          <p:cNvPr id="7" name="Rounded Rectangle 6"/>
+          <p:cNvSpPr/>
+          <p:nvPr/>
+        </p:nvSpPr>
+        <p:spPr>
+          <a:xfrm>
+            <a:off x="868680" y="1627632"/>
+            <a:ext cx="2011680" cy="73152"/>
+          </a:xfrm>
+          <a:prstGeom prst="roundRect">
+            <a:avLst/>
+          </a:prstGeom>
+          <a:solidFill>
+            <a:srgbClr val="E8801A"/>
+          </a:solidFill>
+          <a:ln>
+            <a:noFill/>
+          </a:ln>
+          <a:effectLst/>
+        </p:spPr>
+        <p:style>
+          <a:lnRef idx="1">
+            <a:schemeClr val="accent1"/>
+          </a:lnRef>
+          <a:fillRef idx="3">
+            <a:schemeClr val="accent1"/>
+          </a:fillRef>
+          <a:effectRef idx="2">
+            <a:schemeClr val="accent1"/>
+          </a:effectRef>
+          <a:fontRef idx="minor">
+            <a:schemeClr val="lt1"/>
+          </a:fontRef>
+        </p:style>
+        <p:txBody>
+          <a:bodyPr rtlCol="0" anchor="ctr"/>
+          <a:lstStyle/>
+          <a:p>
+            <a:pPr algn="ctr"/>
+          </a:p>
+        </p:txBody>
+      </p:sp>
+      <p:sp>
+        <p:nvSpPr>
+          <p:cNvPr id="8" name="TextBox 7"/>
           <p:cNvSpPr txBox="1"/>
           <p:nvPr/>
         </p:nvSpPr>
         <p:spPr>
           <a:xfrm>
-            <a:off x="822960" y="1920240"/>
+            <a:off x="822960" y="1965960"/>
             <a:ext cx="4983480" cy="4206240"/>
           </a:xfrm>
           <a:prstGeom prst="rect">
@@ -6278,17 +6565,17 @@
           <a:p>
             <a:pPr>
               <a:spcAft>
-                <a:spcPts val="1000"/>
+                <a:spcPts val="1100"/>
               </a:spcAft>
             </a:pPr>
             <a:r>
               <a:rPr sz="1600" b="1" i="0">
                 <a:solidFill>
-                  <a:srgbClr val="2E3A80"/>
-                </a:solidFill>
-                <a:latin typeface="Montserrat"/>
-              </a:rPr>
-              <a:t>•  </a:t>
+                  <a:srgbClr val="E8801A"/>
+                </a:solidFill>
+                <a:latin typeface="Montserrat"/>
+              </a:rPr>
+              <a:t>▸  </a:t>
             </a:r>
             <a:r>
               <a:rPr sz="1600" b="0" i="0">
@@ -6297,23 +6584,23 @@
                 </a:solidFill>
                 <a:latin typeface="Montserrat"/>
               </a:rPr>
-              <a:t>Grado 1: sin llave ni escalera</a:t>
+              <a:t>En el dormitorio, no</a:t>
             </a:r>
           </a:p>
           <a:p>
             <a:pPr>
               <a:spcAft>
-                <a:spcPts val="1000"/>
+                <a:spcPts val="1100"/>
               </a:spcAft>
             </a:pPr>
             <a:r>
               <a:rPr sz="1600" b="1" i="0">
                 <a:solidFill>
-                  <a:srgbClr val="2E3A80"/>
-                </a:solidFill>
-                <a:latin typeface="Montserrat"/>
-              </a:rPr>
-              <a:t>•  </a:t>
+                  <a:srgbClr val="E8801A"/>
+                </a:solidFill>
+                <a:latin typeface="Montserrat"/>
+              </a:rPr>
+              <a:t>▸  </a:t>
             </a:r>
             <a:r>
               <a:rPr sz="1600" b="0" i="0">
@@ -6322,23 +6609,23 @@
                 </a:solidFill>
                 <a:latin typeface="Montserrat"/>
               </a:rPr>
-              <a:t>Grado 2: cerradura normalizada, sin escalera</a:t>
+              <a:t>En el W.C., no</a:t>
             </a:r>
           </a:p>
           <a:p>
             <a:pPr>
               <a:spcAft>
-                <a:spcPts val="1000"/>
+                <a:spcPts val="1100"/>
               </a:spcAft>
             </a:pPr>
             <a:r>
               <a:rPr sz="1600" b="1" i="0">
                 <a:solidFill>
-                  <a:srgbClr val="2E3A80"/>
-                </a:solidFill>
-                <a:latin typeface="Montserrat"/>
-              </a:rPr>
-              <a:t>•  </a:t>
+                  <a:srgbClr val="E8801A"/>
+                </a:solidFill>
+                <a:latin typeface="Montserrat"/>
+              </a:rPr>
+              <a:t>▸  </a:t>
             </a:r>
             <a:r>
               <a:rPr sz="1600" b="0" i="0">
@@ -6347,14 +6634,39 @@
                 </a:solidFill>
                 <a:latin typeface="Montserrat"/>
               </a:rPr>
-              <a:t>Grado 3: escalera o zona privada</a:t>
-            </a:r>
-          </a:p>
-        </p:txBody>
-      </p:sp>
-      <p:sp>
-        <p:nvSpPr>
-          <p:cNvPr id="8" name="imgph" descr="IMGQ:technician using ladder to reach gas valve"/>
+              <a:t>En el cuarto de baño, no</a:t>
+            </a:r>
+          </a:p>
+          <a:p>
+            <a:pPr>
+              <a:spcAft>
+                <a:spcPts val="1100"/>
+              </a:spcAft>
+            </a:pPr>
+            <a:r>
+              <a:rPr sz="1600" b="1" i="0">
+                <a:solidFill>
+                  <a:srgbClr val="E8801A"/>
+                </a:solidFill>
+                <a:latin typeface="Montserrat"/>
+              </a:rPr>
+              <a:t>▸  </a:t>
+            </a:r>
+            <a:r>
+              <a:rPr sz="1600" b="0" i="0">
+                <a:solidFill>
+                  <a:srgbClr val="1B2330"/>
+                </a:solidFill>
+                <a:latin typeface="Montserrat"/>
+              </a:rPr>
+              <a:t>En el cuarto de ducha, no</a:t>
+            </a:r>
+          </a:p>
+        </p:txBody>
+      </p:sp>
+      <p:sp>
+        <p:nvSpPr>
+          <p:cNvPr id="9" name="imgph" descr="IMGQ:closed bathroom door interior"/>
           <p:cNvSpPr/>
           <p:nvPr/>
         </p:nvSpPr>
@@ -6400,7 +6712,7 @@
       </p:sp>
       <p:sp>
         <p:nvSpPr>
-          <p:cNvPr id="9" name="TextBox 8"/>
+          <p:cNvPr id="10" name="TextBox 9"/>
           <p:cNvSpPr txBox="1"/>
           <p:nvPr/>
         </p:nvSpPr>
@@ -6440,7 +6752,7 @@
                 </a:solidFill>
                 <a:latin typeface="Montserrat"/>
               </a:rPr>
-              <a:t>technician using ladder to reach gas valve</a:t>
+              <a:t>closed bathroom door interior</a:t>
             </a:r>
           </a:p>
         </p:txBody>
@@ -6537,7 +6849,7 @@
                 </a:solidFill>
                 <a:latin typeface="Montserrat"/>
               </a:rPr>
-              <a:t>014 / 016</a:t>
+              <a:t>014 / 017</a:t>
             </a:r>
           </a:p>
         </p:txBody>
@@ -6585,7 +6897,7 @@
         <p:spPr>
           <a:xfrm>
             <a:off x="822960" y="457200"/>
-            <a:ext cx="8229600" cy="365760"/>
+            <a:ext cx="10058400" cy="365760"/>
           </a:xfrm>
           <a:prstGeom prst="rect">
             <a:avLst/>
@@ -6599,13 +6911,13 @@
           <a:lstStyle/>
           <a:p>
             <a:r>
-              <a:rPr sz="1200" b="1" i="0">
-                <a:solidFill>
-                  <a:srgbClr val="64748B"/>
-                </a:solidFill>
-                <a:latin typeface="Montserrat"/>
-              </a:rPr>
-              <a:t>REGLAS DE ACCESIBILIDAD</a:t>
+              <a:rPr sz="1300" b="1" i="0">
+                <a:solidFill>
+                  <a:srgbClr val="E8801A"/>
+                </a:solidFill>
+                <a:latin typeface="Montserrat"/>
+              </a:rPr>
+              <a:t>ACCESIBILIDAD · UNE 60670-2</a:t>
             </a:r>
           </a:p>
         </p:txBody>
@@ -6633,26 +6945,70 @@
           <a:lstStyle/>
           <a:p>
             <a:r>
-              <a:rPr sz="2700" b="1" i="0">
+              <a:rPr sz="2800" b="1" i="0">
                 <a:solidFill>
                   <a:srgbClr val="1E2761"/>
                 </a:solidFill>
                 <a:latin typeface="Montserrat"/>
               </a:rPr>
-              <a:t>La llave de usuario se pone siempre</a:t>
-            </a:r>
-          </a:p>
-        </p:txBody>
-      </p:sp>
-      <p:sp>
-        <p:nvSpPr>
-          <p:cNvPr id="7" name="TextBox 6"/>
+              <a:t>Los tres grados de accesibilidad</a:t>
+            </a:r>
+          </a:p>
+        </p:txBody>
+      </p:sp>
+      <p:sp>
+        <p:nvSpPr>
+          <p:cNvPr id="7" name="Rounded Rectangle 6"/>
+          <p:cNvSpPr/>
+          <p:nvPr/>
+        </p:nvSpPr>
+        <p:spPr>
+          <a:xfrm>
+            <a:off x="868680" y="1627632"/>
+            <a:ext cx="2011680" cy="73152"/>
+          </a:xfrm>
+          <a:prstGeom prst="roundRect">
+            <a:avLst/>
+          </a:prstGeom>
+          <a:solidFill>
+            <a:srgbClr val="E8801A"/>
+          </a:solidFill>
+          <a:ln>
+            <a:noFill/>
+          </a:ln>
+          <a:effectLst/>
+        </p:spPr>
+        <p:style>
+          <a:lnRef idx="1">
+            <a:schemeClr val="accent1"/>
+          </a:lnRef>
+          <a:fillRef idx="3">
+            <a:schemeClr val="accent1"/>
+          </a:fillRef>
+          <a:effectRef idx="2">
+            <a:schemeClr val="accent1"/>
+          </a:effectRef>
+          <a:fontRef idx="minor">
+            <a:schemeClr val="lt1"/>
+          </a:fontRef>
+        </p:style>
+        <p:txBody>
+          <a:bodyPr rtlCol="0" anchor="ctr"/>
+          <a:lstStyle/>
+          <a:p>
+            <a:pPr algn="ctr"/>
+          </a:p>
+        </p:txBody>
+      </p:sp>
+      <p:sp>
+        <p:nvSpPr>
+          <p:cNvPr id="8" name="TextBox 7"/>
           <p:cNvSpPr txBox="1"/>
           <p:nvPr/>
         </p:nvSpPr>
         <p:spPr>
           <a:xfrm>
-            <a:off x="822960" y="1920240"/>
+            <a:off x="822960" y="1965960"/>
             <a:ext cx="4983480" cy="4206240"/>
           </a:xfrm>
           <a:prstGeom prst="rect">
@@ -6668,17 +7024,17 @@
           <a:p>
             <a:pPr>
               <a:spcAft>
-                <a:spcPts val="1000"/>
+                <a:spcPts val="1100"/>
               </a:spcAft>
             </a:pPr>
             <a:r>
               <a:rPr sz="1600" b="1" i="0">
                 <a:solidFill>
-                  <a:srgbClr val="2E3A80"/>
-                </a:solidFill>
-                <a:latin typeface="Montserrat"/>
-              </a:rPr>
-              <a:t>•  </a:t>
+                  <a:srgbClr val="E8801A"/>
+                </a:solidFill>
+                <a:latin typeface="Montserrat"/>
+              </a:rPr>
+              <a:t>▸  </a:t>
             </a:r>
             <a:r>
               <a:rPr sz="1600" b="0" i="0">
@@ -6687,23 +7043,23 @@
                 </a:solidFill>
                 <a:latin typeface="Montserrat"/>
               </a:rPr>
-              <a:t>Llave de usuario en todos los casos</a:t>
+              <a:t>Grado 1: sin llave ni escalera</a:t>
             </a:r>
           </a:p>
           <a:p>
             <a:pPr>
               <a:spcAft>
-                <a:spcPts val="1000"/>
+                <a:spcPts val="1100"/>
               </a:spcAft>
             </a:pPr>
             <a:r>
               <a:rPr sz="1600" b="1" i="0">
                 <a:solidFill>
-                  <a:srgbClr val="2E3A80"/>
-                </a:solidFill>
-                <a:latin typeface="Montserrat"/>
-              </a:rPr>
-              <a:t>•  </a:t>
+                  <a:srgbClr val="E8801A"/>
+                </a:solidFill>
+                <a:latin typeface="Montserrat"/>
+              </a:rPr>
+              <a:t>▸  </a:t>
             </a:r>
             <a:r>
               <a:rPr sz="1600" b="0" i="0">
@@ -6712,23 +7068,23 @@
                 </a:solidFill>
                 <a:latin typeface="Montserrat"/>
               </a:rPr>
-              <a:t>Grado 2 para la distribuidora</a:t>
+              <a:t>Grado 2: cerradura normalizada, sin escalera</a:t>
             </a:r>
           </a:p>
           <a:p>
             <a:pPr>
               <a:spcAft>
-                <a:spcPts val="1000"/>
+                <a:spcPts val="1100"/>
               </a:spcAft>
             </a:pPr>
             <a:r>
               <a:rPr sz="1600" b="1" i="0">
                 <a:solidFill>
-                  <a:srgbClr val="2E3A80"/>
-                </a:solidFill>
-                <a:latin typeface="Montserrat"/>
-              </a:rPr>
-              <a:t>•  </a:t>
+                  <a:srgbClr val="E8801A"/>
+                </a:solidFill>
+                <a:latin typeface="Montserrat"/>
+              </a:rPr>
+              <a:t>▸  </a:t>
             </a:r>
             <a:r>
               <a:rPr sz="1600" b="0" i="0">
@@ -6737,39 +7093,14 @@
                 </a:solidFill>
                 <a:latin typeface="Montserrat"/>
               </a:rPr>
-              <a:t>Desde zona común o límite de propiedad</a:t>
-            </a:r>
-          </a:p>
-          <a:p>
-            <a:pPr>
-              <a:spcAft>
-                <a:spcPts val="1000"/>
-              </a:spcAft>
-            </a:pPr>
-            <a:r>
-              <a:rPr sz="1600" b="1" i="0">
-                <a:solidFill>
-                  <a:srgbClr val="2E3A80"/>
-                </a:solidFill>
-                <a:latin typeface="Montserrat"/>
-              </a:rPr>
-              <a:t>•  </a:t>
-            </a:r>
-            <a:r>
-              <a:rPr sz="1600" b="0" i="0">
-                <a:solidFill>
-                  <a:srgbClr val="1B2330"/>
-                </a:solidFill>
-                <a:latin typeface="Montserrat"/>
-              </a:rPr>
-              <a:t>Obturador: grado 3, no con telemedida</a:t>
-            </a:r>
-          </a:p>
-        </p:txBody>
-      </p:sp>
-      <p:sp>
-        <p:nvSpPr>
-          <p:cNvPr id="8" name="imgph" descr="IMGQ:gas shut off valve yellow handle"/>
+              <a:t>Grado 3: escalera o zona privada</a:t>
+            </a:r>
+          </a:p>
+        </p:txBody>
+      </p:sp>
+      <p:sp>
+        <p:nvSpPr>
+          <p:cNvPr id="9" name="imgph" descr="IMGQ:technician using ladder to reach gas valve"/>
           <p:cNvSpPr/>
           <p:nvPr/>
         </p:nvSpPr>
@@ -6815,7 +7146,7 @@
       </p:sp>
       <p:sp>
         <p:nvSpPr>
-          <p:cNvPr id="9" name="TextBox 8"/>
+          <p:cNvPr id="10" name="TextBox 9"/>
           <p:cNvSpPr txBox="1"/>
           <p:nvPr/>
         </p:nvSpPr>
@@ -6855,7 +7186,7 @@
                 </a:solidFill>
                 <a:latin typeface="Montserrat"/>
               </a:rPr>
-              <a:t>gas shut off valve yellow handle</a:t>
+              <a:t>technician using ladder to reach gas valve</a:t>
             </a:r>
           </a:p>
         </p:txBody>
@@ -6952,7 +7283,7 @@
                 </a:solidFill>
                 <a:latin typeface="Montserrat"/>
               </a:rPr>
-              <a:t>015 / 016</a:t>
+              <a:t>015 / 017</a:t>
             </a:r>
           </a:p>
         </p:txBody>
@@ -7000,7 +7331,7 @@
         <p:spPr>
           <a:xfrm>
             <a:off x="822960" y="457200"/>
-            <a:ext cx="8229600" cy="365760"/>
+            <a:ext cx="10058400" cy="365760"/>
           </a:xfrm>
           <a:prstGeom prst="rect">
             <a:avLst/>
@@ -7014,13 +7345,13 @@
           <a:lstStyle/>
           <a:p>
             <a:r>
-              <a:rPr sz="1200" b="1" i="0">
-                <a:solidFill>
-                  <a:srgbClr val="64748B"/>
-                </a:solidFill>
-                <a:latin typeface="Montserrat"/>
-              </a:rPr>
-              <a:t>IRC FRENTE A IRI</a:t>
+              <a:rPr sz="1300" b="1" i="0">
+                <a:solidFill>
+                  <a:srgbClr val="E8801A"/>
+                </a:solidFill>
+                <a:latin typeface="Montserrat"/>
+              </a:rPr>
+              <a:t>REGLAS DE ACCESIBILIDAD</a:t>
             </a:r>
           </a:p>
         </p:txBody>
@@ -7048,26 +7379,70 @@
           <a:lstStyle/>
           <a:p>
             <a:r>
-              <a:rPr sz="2700" b="1" i="0">
+              <a:rPr sz="2800" b="1" i="0">
                 <a:solidFill>
                   <a:srgbClr val="1E2761"/>
                 </a:solidFill>
                 <a:latin typeface="Montserrat"/>
               </a:rPr>
-              <a:t>Zona común manda grado; casa, grado 1</a:t>
-            </a:r>
-          </a:p>
-        </p:txBody>
-      </p:sp>
-      <p:sp>
-        <p:nvSpPr>
-          <p:cNvPr id="7" name="TextBox 6"/>
+              <a:t>La llave de usuario se pone siempre</a:t>
+            </a:r>
+          </a:p>
+        </p:txBody>
+      </p:sp>
+      <p:sp>
+        <p:nvSpPr>
+          <p:cNvPr id="7" name="Rounded Rectangle 6"/>
+          <p:cNvSpPr/>
+          <p:nvPr/>
+        </p:nvSpPr>
+        <p:spPr>
+          <a:xfrm>
+            <a:off x="868680" y="1627632"/>
+            <a:ext cx="2011680" cy="73152"/>
+          </a:xfrm>
+          <a:prstGeom prst="roundRect">
+            <a:avLst/>
+          </a:prstGeom>
+          <a:solidFill>
+            <a:srgbClr val="E8801A"/>
+          </a:solidFill>
+          <a:ln>
+            <a:noFill/>
+          </a:ln>
+          <a:effectLst/>
+        </p:spPr>
+        <p:style>
+          <a:lnRef idx="1">
+            <a:schemeClr val="accent1"/>
+          </a:lnRef>
+          <a:fillRef idx="3">
+            <a:schemeClr val="accent1"/>
+          </a:fillRef>
+          <a:effectRef idx="2">
+            <a:schemeClr val="accent1"/>
+          </a:effectRef>
+          <a:fontRef idx="minor">
+            <a:schemeClr val="lt1"/>
+          </a:fontRef>
+        </p:style>
+        <p:txBody>
+          <a:bodyPr rtlCol="0" anchor="ctr"/>
+          <a:lstStyle/>
+          <a:p>
+            <a:pPr algn="ctr"/>
+          </a:p>
+        </p:txBody>
+      </p:sp>
+      <p:sp>
+        <p:nvSpPr>
+          <p:cNvPr id="8" name="TextBox 7"/>
           <p:cNvSpPr txBox="1"/>
           <p:nvPr/>
         </p:nvSpPr>
         <p:spPr>
           <a:xfrm>
-            <a:off x="822960" y="1920240"/>
+            <a:off x="822960" y="1965960"/>
             <a:ext cx="4983480" cy="4206240"/>
           </a:xfrm>
           <a:prstGeom prst="rect">
@@ -7083,17 +7458,17 @@
           <a:p>
             <a:pPr>
               <a:spcAft>
-                <a:spcPts val="1000"/>
+                <a:spcPts val="1100"/>
               </a:spcAft>
             </a:pPr>
             <a:r>
               <a:rPr sz="1600" b="1" i="0">
                 <a:solidFill>
-                  <a:srgbClr val="2E3A80"/>
-                </a:solidFill>
-                <a:latin typeface="Montserrat"/>
-              </a:rPr>
-              <a:t>•  </a:t>
+                  <a:srgbClr val="E8801A"/>
+                </a:solidFill>
+                <a:latin typeface="Montserrat"/>
+              </a:rPr>
+              <a:t>▸  </a:t>
             </a:r>
             <a:r>
               <a:rPr sz="1600" b="0" i="0">
@@ -7102,23 +7477,23 @@
                 </a:solidFill>
                 <a:latin typeface="Montserrat"/>
               </a:rPr>
-              <a:t>Distribuidora: zona común, grado 2 o 3</a:t>
+              <a:t>Llave de usuario en todos los casos</a:t>
             </a:r>
           </a:p>
           <a:p>
             <a:pPr>
               <a:spcAft>
-                <a:spcPts val="1000"/>
+                <a:spcPts val="1100"/>
               </a:spcAft>
             </a:pPr>
             <a:r>
               <a:rPr sz="1600" b="1" i="0">
                 <a:solidFill>
-                  <a:srgbClr val="2E3A80"/>
-                </a:solidFill>
-                <a:latin typeface="Montserrat"/>
-              </a:rPr>
-              <a:t>•  </a:t>
+                  <a:srgbClr val="E8801A"/>
+                </a:solidFill>
+                <a:latin typeface="Montserrat"/>
+              </a:rPr>
+              <a:t>▸  </a:t>
             </a:r>
             <a:r>
               <a:rPr sz="1600" b="0" i="0">
@@ -7127,23 +7502,23 @@
                 </a:solidFill>
                 <a:latin typeface="Montserrat"/>
               </a:rPr>
-              <a:t>Usuario: dentro de casa, grado 1</a:t>
+              <a:t>Grado 2 para la distribuidora</a:t>
             </a:r>
           </a:p>
           <a:p>
             <a:pPr>
               <a:spcAft>
-                <a:spcPts val="1000"/>
+                <a:spcPts val="1100"/>
               </a:spcAft>
             </a:pPr>
             <a:r>
               <a:rPr sz="1600" b="1" i="0">
                 <a:solidFill>
-                  <a:srgbClr val="2E3A80"/>
-                </a:solidFill>
-                <a:latin typeface="Montserrat"/>
-              </a:rPr>
-              <a:t>•  </a:t>
+                  <a:srgbClr val="E8801A"/>
+                </a:solidFill>
+                <a:latin typeface="Montserrat"/>
+              </a:rPr>
+              <a:t>▸  </a:t>
             </a:r>
             <a:r>
               <a:rPr sz="1600" b="0" i="0">
@@ -7152,23 +7527,23 @@
                 </a:solidFill>
                 <a:latin typeface="Montserrat"/>
               </a:rPr>
-              <a:t>Acometida: grado 1 o 2, zona pública</a:t>
+              <a:t>Desde zona común o límite de propiedad</a:t>
             </a:r>
           </a:p>
           <a:p>
             <a:pPr>
               <a:spcAft>
-                <a:spcPts val="1000"/>
+                <a:spcPts val="1100"/>
               </a:spcAft>
             </a:pPr>
             <a:r>
               <a:rPr sz="1600" b="1" i="0">
                 <a:solidFill>
-                  <a:srgbClr val="2E3A80"/>
-                </a:solidFill>
-                <a:latin typeface="Montserrat"/>
-              </a:rPr>
-              <a:t>•  </a:t>
+                  <a:srgbClr val="E8801A"/>
+                </a:solidFill>
+                <a:latin typeface="Montserrat"/>
+              </a:rPr>
+              <a:t>▸  </a:t>
             </a:r>
             <a:r>
               <a:rPr sz="1600" b="0" i="0">
@@ -7177,14 +7552,14 @@
                 </a:solidFill>
                 <a:latin typeface="Montserrat"/>
               </a:rPr>
-              <a:t>Todo queda en el boletín</a:t>
-            </a:r>
-          </a:p>
-        </p:txBody>
-      </p:sp>
-      <p:sp>
-        <p:nvSpPr>
-          <p:cNvPr id="8" name="imgph" descr="IMGQ:gas installation pipes and valves building"/>
+              <a:t>Obturador: grado 3, no con telemedida</a:t>
+            </a:r>
+          </a:p>
+        </p:txBody>
+      </p:sp>
+      <p:sp>
+        <p:nvSpPr>
+          <p:cNvPr id="9" name="imgph" descr="IMGQ:gas shut off valve yellow handle"/>
           <p:cNvSpPr/>
           <p:nvPr/>
         </p:nvSpPr>
@@ -7230,7 +7605,7 @@
       </p:sp>
       <p:sp>
         <p:nvSpPr>
-          <p:cNvPr id="9" name="TextBox 8"/>
+          <p:cNvPr id="10" name="TextBox 9"/>
           <p:cNvSpPr txBox="1"/>
           <p:nvPr/>
         </p:nvSpPr>
@@ -7270,7 +7645,7 @@
                 </a:solidFill>
                 <a:latin typeface="Montserrat"/>
               </a:rPr>
-              <a:t>gas installation pipes and valves building</a:t>
+              <a:t>gas shut off valve yellow handle</a:t>
             </a:r>
           </a:p>
         </p:txBody>
@@ -7308,6 +7683,465 @@
             <a:avLst/>
           </a:prstGeom>
           <a:solidFill>
+            <a:srgbClr val="FFFFFF"/>
+          </a:solidFill>
+          <a:ln>
+            <a:noFill/>
+          </a:ln>
+          <a:effectLst/>
+        </p:spPr>
+        <p:style>
+          <a:lnRef idx="1">
+            <a:schemeClr val="accent1"/>
+          </a:lnRef>
+          <a:fillRef idx="3">
+            <a:schemeClr val="accent1"/>
+          </a:fillRef>
+          <a:effectRef idx="2">
+            <a:schemeClr val="accent1"/>
+          </a:effectRef>
+          <a:fontRef idx="minor">
+            <a:schemeClr val="lt1"/>
+          </a:fontRef>
+        </p:style>
+        <p:txBody>
+          <a:bodyPr rtlCol="0" anchor="ctr"/>
+          <a:lstStyle/>
+          <a:p>
+            <a:pPr algn="ctr"/>
+          </a:p>
+        </p:txBody>
+      </p:sp>
+      <p:sp>
+        <p:nvSpPr>
+          <p:cNvPr id="3" name="TextBox 2"/>
+          <p:cNvSpPr txBox="1"/>
+          <p:nvPr/>
+        </p:nvSpPr>
+        <p:spPr>
+          <a:xfrm>
+            <a:off x="10607040" y="320040"/>
+            <a:ext cx="1371600" cy="365760"/>
+          </a:xfrm>
+          <a:prstGeom prst="rect">
+            <a:avLst/>
+          </a:prstGeom>
+          <a:noFill/>
+        </p:spPr>
+        <p:txBody>
+          <a:bodyPr wrap="square">
+            <a:spAutoFit/>
+          </a:bodyPr>
+          <a:lstStyle/>
+          <a:p>
+            <a:pPr algn="r"/>
+            <a:r>
+              <a:rPr sz="1000" b="1" i="0">
+                <a:solidFill>
+                  <a:srgbClr val="64748B"/>
+                </a:solidFill>
+                <a:latin typeface="Montserrat"/>
+              </a:rPr>
+              <a:t>016 / 017</a:t>
+            </a:r>
+          </a:p>
+        </p:txBody>
+      </p:sp>
+      <p:sp>
+        <p:nvSpPr>
+          <p:cNvPr id="4" name="TextBox 3"/>
+          <p:cNvSpPr txBox="1"/>
+          <p:nvPr/>
+        </p:nvSpPr>
+        <p:spPr>
+          <a:xfrm>
+            <a:off x="457200" y="6419088"/>
+            <a:ext cx="8229600" cy="365760"/>
+          </a:xfrm>
+          <a:prstGeom prst="rect">
+            <a:avLst/>
+          </a:prstGeom>
+          <a:noFill/>
+        </p:spPr>
+        <p:txBody>
+          <a:bodyPr wrap="square">
+            <a:spAutoFit/>
+          </a:bodyPr>
+          <a:lstStyle/>
+          <a:p>
+            <a:r>
+              <a:rPr sz="900" b="0" i="0">
+                <a:solidFill>
+                  <a:srgbClr val="64748B"/>
+                </a:solidFill>
+                <a:latin typeface="Montserrat"/>
+              </a:rPr>
+              <a:t>Curso Gas B · Tema 17 · Gas a la primera</a:t>
+            </a:r>
+          </a:p>
+        </p:txBody>
+      </p:sp>
+      <p:sp>
+        <p:nvSpPr>
+          <p:cNvPr id="5" name="TextBox 4"/>
+          <p:cNvSpPr txBox="1"/>
+          <p:nvPr/>
+        </p:nvSpPr>
+        <p:spPr>
+          <a:xfrm>
+            <a:off x="822960" y="457200"/>
+            <a:ext cx="10058400" cy="365760"/>
+          </a:xfrm>
+          <a:prstGeom prst="rect">
+            <a:avLst/>
+          </a:prstGeom>
+          <a:noFill/>
+        </p:spPr>
+        <p:txBody>
+          <a:bodyPr wrap="square">
+            <a:spAutoFit/>
+          </a:bodyPr>
+          <a:lstStyle/>
+          <a:p>
+            <a:r>
+              <a:rPr sz="1300" b="1" i="0">
+                <a:solidFill>
+                  <a:srgbClr val="E8801A"/>
+                </a:solidFill>
+                <a:latin typeface="Montserrat"/>
+              </a:rPr>
+              <a:t>IRC FRENTE A IRI</a:t>
+            </a:r>
+          </a:p>
+        </p:txBody>
+      </p:sp>
+      <p:sp>
+        <p:nvSpPr>
+          <p:cNvPr id="6" name="TextBox 5"/>
+          <p:cNvSpPr txBox="1"/>
+          <p:nvPr/>
+        </p:nvSpPr>
+        <p:spPr>
+          <a:xfrm>
+            <a:off x="822960" y="868680"/>
+            <a:ext cx="10515600" cy="914400"/>
+          </a:xfrm>
+          <a:prstGeom prst="rect">
+            <a:avLst/>
+          </a:prstGeom>
+          <a:noFill/>
+        </p:spPr>
+        <p:txBody>
+          <a:bodyPr wrap="square">
+            <a:spAutoFit/>
+          </a:bodyPr>
+          <a:lstStyle/>
+          <a:p>
+            <a:r>
+              <a:rPr sz="2800" b="1" i="0">
+                <a:solidFill>
+                  <a:srgbClr val="1E2761"/>
+                </a:solidFill>
+                <a:latin typeface="Montserrat"/>
+              </a:rPr>
+              <a:t>Zona común manda grado; casa, grado 1</a:t>
+            </a:r>
+          </a:p>
+        </p:txBody>
+      </p:sp>
+      <p:sp>
+        <p:nvSpPr>
+          <p:cNvPr id="7" name="Rounded Rectangle 6"/>
+          <p:cNvSpPr/>
+          <p:nvPr/>
+        </p:nvSpPr>
+        <p:spPr>
+          <a:xfrm>
+            <a:off x="868680" y="1627632"/>
+            <a:ext cx="2011680" cy="73152"/>
+          </a:xfrm>
+          <a:prstGeom prst="roundRect">
+            <a:avLst/>
+          </a:prstGeom>
+          <a:solidFill>
+            <a:srgbClr val="E8801A"/>
+          </a:solidFill>
+          <a:ln>
+            <a:noFill/>
+          </a:ln>
+          <a:effectLst/>
+        </p:spPr>
+        <p:style>
+          <a:lnRef idx="1">
+            <a:schemeClr val="accent1"/>
+          </a:lnRef>
+          <a:fillRef idx="3">
+            <a:schemeClr val="accent1"/>
+          </a:fillRef>
+          <a:effectRef idx="2">
+            <a:schemeClr val="accent1"/>
+          </a:effectRef>
+          <a:fontRef idx="minor">
+            <a:schemeClr val="lt1"/>
+          </a:fontRef>
+        </p:style>
+        <p:txBody>
+          <a:bodyPr rtlCol="0" anchor="ctr"/>
+          <a:lstStyle/>
+          <a:p>
+            <a:pPr algn="ctr"/>
+          </a:p>
+        </p:txBody>
+      </p:sp>
+      <p:sp>
+        <p:nvSpPr>
+          <p:cNvPr id="8" name="TextBox 7"/>
+          <p:cNvSpPr txBox="1"/>
+          <p:nvPr/>
+        </p:nvSpPr>
+        <p:spPr>
+          <a:xfrm>
+            <a:off x="822960" y="1965960"/>
+            <a:ext cx="4983480" cy="4206240"/>
+          </a:xfrm>
+          <a:prstGeom prst="rect">
+            <a:avLst/>
+          </a:prstGeom>
+          <a:noFill/>
+        </p:spPr>
+        <p:txBody>
+          <a:bodyPr wrap="square">
+            <a:spAutoFit/>
+          </a:bodyPr>
+          <a:lstStyle/>
+          <a:p>
+            <a:pPr>
+              <a:spcAft>
+                <a:spcPts val="1100"/>
+              </a:spcAft>
+            </a:pPr>
+            <a:r>
+              <a:rPr sz="1600" b="1" i="0">
+                <a:solidFill>
+                  <a:srgbClr val="E8801A"/>
+                </a:solidFill>
+                <a:latin typeface="Montserrat"/>
+              </a:rPr>
+              <a:t>▸  </a:t>
+            </a:r>
+            <a:r>
+              <a:rPr sz="1600" b="0" i="0">
+                <a:solidFill>
+                  <a:srgbClr val="1B2330"/>
+                </a:solidFill>
+                <a:latin typeface="Montserrat"/>
+              </a:rPr>
+              <a:t>Distribuidora: zona común, grado 2 o 3</a:t>
+            </a:r>
+          </a:p>
+          <a:p>
+            <a:pPr>
+              <a:spcAft>
+                <a:spcPts val="1100"/>
+              </a:spcAft>
+            </a:pPr>
+            <a:r>
+              <a:rPr sz="1600" b="1" i="0">
+                <a:solidFill>
+                  <a:srgbClr val="E8801A"/>
+                </a:solidFill>
+                <a:latin typeface="Montserrat"/>
+              </a:rPr>
+              <a:t>▸  </a:t>
+            </a:r>
+            <a:r>
+              <a:rPr sz="1600" b="0" i="0">
+                <a:solidFill>
+                  <a:srgbClr val="1B2330"/>
+                </a:solidFill>
+                <a:latin typeface="Montserrat"/>
+              </a:rPr>
+              <a:t>Usuario: dentro de casa, grado 1</a:t>
+            </a:r>
+          </a:p>
+          <a:p>
+            <a:pPr>
+              <a:spcAft>
+                <a:spcPts val="1100"/>
+              </a:spcAft>
+            </a:pPr>
+            <a:r>
+              <a:rPr sz="1600" b="1" i="0">
+                <a:solidFill>
+                  <a:srgbClr val="E8801A"/>
+                </a:solidFill>
+                <a:latin typeface="Montserrat"/>
+              </a:rPr>
+              <a:t>▸  </a:t>
+            </a:r>
+            <a:r>
+              <a:rPr sz="1600" b="0" i="0">
+                <a:solidFill>
+                  <a:srgbClr val="1B2330"/>
+                </a:solidFill>
+                <a:latin typeface="Montserrat"/>
+              </a:rPr>
+              <a:t>Acometida: grado 1 o 2, zona pública</a:t>
+            </a:r>
+          </a:p>
+          <a:p>
+            <a:pPr>
+              <a:spcAft>
+                <a:spcPts val="1100"/>
+              </a:spcAft>
+            </a:pPr>
+            <a:r>
+              <a:rPr sz="1600" b="1" i="0">
+                <a:solidFill>
+                  <a:srgbClr val="E8801A"/>
+                </a:solidFill>
+                <a:latin typeface="Montserrat"/>
+              </a:rPr>
+              <a:t>▸  </a:t>
+            </a:r>
+            <a:r>
+              <a:rPr sz="1600" b="0" i="0">
+                <a:solidFill>
+                  <a:srgbClr val="1B2330"/>
+                </a:solidFill>
+                <a:latin typeface="Montserrat"/>
+              </a:rPr>
+              <a:t>Todo queda en el boletín</a:t>
+            </a:r>
+          </a:p>
+        </p:txBody>
+      </p:sp>
+      <p:sp>
+        <p:nvSpPr>
+          <p:cNvPr id="9" name="imgph" descr="IMGQ:gas installation pipes and valves building"/>
+          <p:cNvSpPr/>
+          <p:nvPr/>
+        </p:nvSpPr>
+        <p:spPr>
+          <a:xfrm>
+            <a:off x="5806440" y="1051560"/>
+            <a:ext cx="5298947" cy="4629150"/>
+          </a:xfrm>
+          <a:prstGeom prst="roundRect">
+            <a:avLst/>
+          </a:prstGeom>
+          <a:solidFill>
+            <a:srgbClr val="F3F6FB"/>
+          </a:solidFill>
+          <a:ln w="12700">
+            <a:solidFill>
+              <a:srgbClr val="C7D2E6"/>
+            </a:solidFill>
+          </a:ln>
+          <a:effectLst/>
+        </p:spPr>
+        <p:style>
+          <a:lnRef idx="1">
+            <a:schemeClr val="accent1"/>
+          </a:lnRef>
+          <a:fillRef idx="3">
+            <a:schemeClr val="accent1"/>
+          </a:fillRef>
+          <a:effectRef idx="2">
+            <a:schemeClr val="accent1"/>
+          </a:effectRef>
+          <a:fontRef idx="minor">
+            <a:schemeClr val="lt1"/>
+          </a:fontRef>
+        </p:style>
+        <p:txBody>
+          <a:bodyPr rtlCol="0" anchor="ctr"/>
+          <a:lstStyle/>
+          <a:p>
+            <a:pPr algn="ctr"/>
+          </a:p>
+        </p:txBody>
+      </p:sp>
+      <p:sp>
+        <p:nvSpPr>
+          <p:cNvPr id="10" name="TextBox 9"/>
+          <p:cNvSpPr txBox="1"/>
+          <p:nvPr/>
+        </p:nvSpPr>
+        <p:spPr>
+          <a:xfrm>
+            <a:off x="6080760" y="2726055"/>
+            <a:ext cx="4750307" cy="1280160"/>
+          </a:xfrm>
+          <a:prstGeom prst="rect">
+            <a:avLst/>
+          </a:prstGeom>
+          <a:noFill/>
+        </p:spPr>
+        <p:txBody>
+          <a:bodyPr wrap="square">
+            <a:spAutoFit/>
+          </a:bodyPr>
+          <a:lstStyle/>
+          <a:p>
+            <a:pPr algn="ctr"/>
+            <a:r>
+              <a:rPr sz="1400" b="1" i="0">
+                <a:solidFill>
+                  <a:srgbClr val="64748B"/>
+                </a:solidFill>
+                <a:latin typeface="Montserrat"/>
+              </a:rPr>
+              <a:t>IMAGEN REALISTA</a:t>
+            </a:r>
+          </a:p>
+          <a:p>
+            <a:pPr algn="ctr"/>
+            <a:r>
+              <a:rPr sz="1100" b="0" i="1">
+                <a:solidFill>
+                  <a:srgbClr val="64748B"/>
+                </a:solidFill>
+                <a:latin typeface="Montserrat"/>
+              </a:rPr>
+              <a:t>gas installation pipes and valves building</a:t>
+            </a:r>
+          </a:p>
+        </p:txBody>
+      </p:sp>
+    </p:spTree>
+  </p:cSld>
+  <p:clrMapOvr>
+    <a:masterClrMapping/>
+  </p:clrMapOvr>
+</p:sld>
+</file>
+
+<file path=ppt/slides/slide17.xml><?xml version="1.0" encoding="utf-8"?>
+<p:sld xmlns:a="http://schemas.openxmlformats.org/drawingml/2006/main" xmlns:p="http://schemas.openxmlformats.org/presentationml/2006/main" xmlns:r="http://schemas.openxmlformats.org/officeDocument/2006/relationships">
+  <p:cSld>
+    <p:spTree>
+      <p:nvGrpSpPr>
+        <p:cNvPr id="1" name=""/>
+        <p:cNvGrpSpPr/>
+        <p:nvPr/>
+      </p:nvGrpSpPr>
+      <p:grpSpPr/>
+      <p:sp>
+        <p:nvSpPr>
+          <p:cNvPr id="2" name="Rectangle 1"/>
+          <p:cNvSpPr/>
+          <p:nvPr/>
+        </p:nvSpPr>
+        <p:spPr>
+          <a:xfrm>
+            <a:off x="0" y="0"/>
+            <a:ext cx="12191695" cy="6858000"/>
+          </a:xfrm>
+          <a:prstGeom prst="rect">
+            <a:avLst/>
+          </a:prstGeom>
+          <a:solidFill>
             <a:srgbClr val="1E2761"/>
           </a:solidFill>
           <a:ln>
@@ -7362,7 +8196,7 @@
             <a:r>
               <a:rPr sz="1400" b="1" i="0">
                 <a:solidFill>
-                  <a:srgbClr val="CADCFC"/>
+                  <a:srgbClr val="F4A24C"/>
                 </a:solidFill>
                 <a:latin typeface="Montserrat"/>
               </a:rPr>
@@ -7373,13 +8207,57 @@
       </p:sp>
       <p:sp>
         <p:nvSpPr>
-          <p:cNvPr id="4" name="TextBox 3"/>
+          <p:cNvPr id="4" name="Rounded Rectangle 3"/>
+          <p:cNvSpPr/>
+          <p:nvPr/>
+        </p:nvSpPr>
+        <p:spPr>
+          <a:xfrm>
+            <a:off x="868680" y="1051560"/>
+            <a:ext cx="1463040" cy="82296"/>
+          </a:xfrm>
+          <a:prstGeom prst="roundRect">
+            <a:avLst/>
+          </a:prstGeom>
+          <a:solidFill>
+            <a:srgbClr val="E8801A"/>
+          </a:solidFill>
+          <a:ln>
+            <a:noFill/>
+          </a:ln>
+          <a:effectLst/>
+        </p:spPr>
+        <p:style>
+          <a:lnRef idx="1">
+            <a:schemeClr val="accent1"/>
+          </a:lnRef>
+          <a:fillRef idx="3">
+            <a:schemeClr val="accent1"/>
+          </a:fillRef>
+          <a:effectRef idx="2">
+            <a:schemeClr val="accent1"/>
+          </a:effectRef>
+          <a:fontRef idx="minor">
+            <a:schemeClr val="lt1"/>
+          </a:fontRef>
+        </p:style>
+        <p:txBody>
+          <a:bodyPr rtlCol="0" anchor="ctr"/>
+          <a:lstStyle/>
+          <a:p>
+            <a:pPr algn="ctr"/>
+          </a:p>
+        </p:txBody>
+      </p:sp>
+      <p:sp>
+        <p:nvSpPr>
+          <p:cNvPr id="5" name="TextBox 4"/>
           <p:cNvSpPr txBox="1"/>
           <p:nvPr/>
         </p:nvSpPr>
         <p:spPr>
           <a:xfrm>
-            <a:off x="822960" y="1143000"/>
+            <a:off x="822960" y="1234440"/>
             <a:ext cx="10515600" cy="1097280"/>
           </a:xfrm>
           <a:prstGeom prst="rect">
@@ -7407,14 +8285,14 @@
       </p:sp>
       <p:sp>
         <p:nvSpPr>
-          <p:cNvPr id="5" name="TextBox 4"/>
+          <p:cNvPr id="6" name="TextBox 5"/>
           <p:cNvSpPr txBox="1"/>
           <p:nvPr/>
         </p:nvSpPr>
         <p:spPr>
           <a:xfrm>
-            <a:off x="822960" y="2514600"/>
-            <a:ext cx="10515600" cy="2834640"/>
+            <a:off x="822960" y="2606040"/>
+            <a:ext cx="10515600" cy="2743200"/>
           </a:xfrm>
           <a:prstGeom prst="rect">
             <a:avLst/>
@@ -7435,7 +8313,7 @@
             <a:r>
               <a:rPr sz="2000" b="1" i="0">
                 <a:solidFill>
-                  <a:srgbClr val="CADCFC"/>
+                  <a:srgbClr val="F4A24C"/>
                 </a:solidFill>
                 <a:latin typeface="Montserrat"/>
               </a:rPr>
@@ -7460,7 +8338,7 @@
             <a:r>
               <a:rPr sz="2000" b="1" i="0">
                 <a:solidFill>
-                  <a:srgbClr val="CADCFC"/>
+                  <a:srgbClr val="F4A24C"/>
                 </a:solidFill>
                 <a:latin typeface="Montserrat"/>
               </a:rPr>
@@ -7485,7 +8363,7 @@
             <a:r>
               <a:rPr sz="2000" b="1" i="0">
                 <a:solidFill>
-                  <a:srgbClr val="CADCFC"/>
+                  <a:srgbClr val="F4A24C"/>
                 </a:solidFill>
                 <a:latin typeface="Montserrat"/>
               </a:rPr>
@@ -7510,7 +8388,7 @@
             <a:r>
               <a:rPr sz="2000" b="1" i="0">
                 <a:solidFill>
-                  <a:srgbClr val="CADCFC"/>
+                  <a:srgbClr val="F4A24C"/>
                 </a:solidFill>
                 <a:latin typeface="Montserrat"/>
               </a:rPr>
@@ -7530,20 +8408,20 @@
       </p:sp>
       <p:sp>
         <p:nvSpPr>
-          <p:cNvPr id="6" name="Rounded Rectangle 5"/>
+          <p:cNvPr id="7" name="Rounded Rectangle 6"/>
           <p:cNvSpPr/>
           <p:nvPr/>
         </p:nvSpPr>
         <p:spPr>
           <a:xfrm>
             <a:off x="822960" y="5532120"/>
-            <a:ext cx="10515600" cy="777240"/>
+            <a:ext cx="10515600" cy="822960"/>
           </a:xfrm>
           <a:prstGeom prst="roundRect">
             <a:avLst/>
           </a:prstGeom>
           <a:solidFill>
-            <a:srgbClr val="2E3A80"/>
+            <a:srgbClr val="E8801A"/>
           </a:solidFill>
           <a:ln>
             <a:noFill/>
@@ -7574,13 +8452,13 @@
       </p:sp>
       <p:sp>
         <p:nvSpPr>
-          <p:cNvPr id="7" name="TextBox 6"/>
+          <p:cNvPr id="8" name="TextBox 7"/>
           <p:cNvSpPr txBox="1"/>
           <p:nvPr/>
         </p:nvSpPr>
         <p:spPr>
           <a:xfrm>
-            <a:off x="1051560" y="5605272"/>
+            <a:off x="1051560" y="5623560"/>
             <a:ext cx="10058400" cy="640080"/>
           </a:xfrm>
           <a:prstGeom prst="rect">
@@ -7597,7 +8475,7 @@
             <a:r>
               <a:rPr sz="1500" b="1" i="1">
                 <a:solidFill>
-                  <a:srgbClr val="CADCFC"/>
+                  <a:srgbClr val="1E2761"/>
                 </a:solidFill>
                 <a:latin typeface="Montserrat"/>
               </a:rPr>
@@ -7698,7 +8576,7 @@
                 </a:solidFill>
                 <a:latin typeface="Montserrat"/>
               </a:rPr>
-              <a:t>002 / 016</a:t>
+              <a:t>002 / 017</a:t>
             </a:r>
           </a:p>
         </p:txBody>
@@ -7762,7 +8640,7 @@
             <a:r>
               <a:rPr sz="2700" b="1" i="0">
                 <a:solidFill>
-                  <a:srgbClr val="1E2761"/>
+                  <a:srgbClr val="E8801A"/>
                 </a:solidFill>
                 <a:latin typeface="Montserrat"/>
               </a:rPr>
@@ -7774,6 +8652,50 @@
       <p:sp>
         <p:nvSpPr>
           <p:cNvPr id="6" name="Rounded Rectangle 5"/>
+          <p:cNvSpPr/>
+          <p:nvPr/>
+        </p:nvSpPr>
+        <p:spPr>
+          <a:xfrm>
+            <a:off x="868680" y="1234440"/>
+            <a:ext cx="1463040" cy="73152"/>
+          </a:xfrm>
+          <a:prstGeom prst="roundRect">
+            <a:avLst/>
+          </a:prstGeom>
+          <a:solidFill>
+            <a:srgbClr val="1E2761"/>
+          </a:solidFill>
+          <a:ln>
+            <a:noFill/>
+          </a:ln>
+          <a:effectLst/>
+        </p:spPr>
+        <p:style>
+          <a:lnRef idx="1">
+            <a:schemeClr val="accent1"/>
+          </a:lnRef>
+          <a:fillRef idx="3">
+            <a:schemeClr val="accent1"/>
+          </a:fillRef>
+          <a:effectRef idx="2">
+            <a:schemeClr val="accent1"/>
+          </a:effectRef>
+          <a:fontRef idx="minor">
+            <a:schemeClr val="lt1"/>
+          </a:fontRef>
+        </p:style>
+        <p:txBody>
+          <a:bodyPr rtlCol="0" anchor="ctr"/>
+          <a:lstStyle/>
+          <a:p>
+            <a:pPr algn="ctr"/>
+          </a:p>
+        </p:txBody>
+      </p:sp>
+      <p:sp>
+        <p:nvSpPr>
+          <p:cNvPr id="7" name="Rounded Rectangle 6"/>
           <p:cNvSpPr/>
           <p:nvPr/>
         </p:nvSpPr>
@@ -7819,7 +8741,7 @@
       </p:sp>
       <p:sp>
         <p:nvSpPr>
-          <p:cNvPr id="7" name="TextBox 6"/>
+          <p:cNvPr id="8" name="TextBox 7"/>
           <p:cNvSpPr txBox="1"/>
           <p:nvPr/>
         </p:nvSpPr>
@@ -7854,7 +8776,7 @@
       </p:sp>
       <p:sp>
         <p:nvSpPr>
-          <p:cNvPr id="8" name="TextBox 7"/>
+          <p:cNvPr id="9" name="TextBox 8"/>
           <p:cNvSpPr txBox="1"/>
           <p:nvPr/>
         </p:nvSpPr>
@@ -7889,7 +8811,7 @@
       </p:sp>
       <p:sp>
         <p:nvSpPr>
-          <p:cNvPr id="9" name="Rounded Rectangle 8"/>
+          <p:cNvPr id="10" name="Rounded Rectangle 9"/>
           <p:cNvSpPr/>
           <p:nvPr/>
         </p:nvSpPr>
@@ -7935,7 +8857,7 @@
       </p:sp>
       <p:sp>
         <p:nvSpPr>
-          <p:cNvPr id="10" name="TextBox 9"/>
+          <p:cNvPr id="11" name="TextBox 10"/>
           <p:cNvSpPr txBox="1"/>
           <p:nvPr/>
         </p:nvSpPr>
@@ -7970,7 +8892,7 @@
       </p:sp>
       <p:sp>
         <p:nvSpPr>
-          <p:cNvPr id="11" name="TextBox 10"/>
+          <p:cNvPr id="12" name="TextBox 11"/>
           <p:cNvSpPr txBox="1"/>
           <p:nvPr/>
         </p:nvSpPr>
@@ -8005,7 +8927,7 @@
       </p:sp>
       <p:sp>
         <p:nvSpPr>
-          <p:cNvPr id="12" name="Rounded Rectangle 11"/>
+          <p:cNvPr id="13" name="Rounded Rectangle 12"/>
           <p:cNvSpPr/>
           <p:nvPr/>
         </p:nvSpPr>
@@ -8051,7 +8973,7 @@
       </p:sp>
       <p:sp>
         <p:nvSpPr>
-          <p:cNvPr id="13" name="TextBox 12"/>
+          <p:cNvPr id="14" name="TextBox 13"/>
           <p:cNvSpPr txBox="1"/>
           <p:nvPr/>
         </p:nvSpPr>
@@ -8086,7 +9008,7 @@
       </p:sp>
       <p:sp>
         <p:nvSpPr>
-          <p:cNvPr id="14" name="TextBox 13"/>
+          <p:cNvPr id="15" name="TextBox 14"/>
           <p:cNvSpPr txBox="1"/>
           <p:nvPr/>
         </p:nvSpPr>
@@ -8211,7 +9133,7 @@
                 </a:solidFill>
                 <a:latin typeface="Montserrat"/>
               </a:rPr>
-              <a:t>003 / 016</a:t>
+              <a:t>003 / 017</a:t>
             </a:r>
           </a:p>
         </p:txBody>
@@ -8258,7 +9180,7 @@
         </p:nvSpPr>
         <p:spPr>
           <a:xfrm>
-            <a:off x="822960" y="457200"/>
+            <a:off x="822960" y="502920"/>
             <a:ext cx="8229600" cy="365760"/>
           </a:xfrm>
           <a:prstGeom prst="rect">
@@ -8273,13 +9195,13 @@
           <a:lstStyle/>
           <a:p>
             <a:r>
-              <a:rPr sz="1200" b="1" i="0">
-                <a:solidFill>
-                  <a:srgbClr val="64748B"/>
-                </a:solidFill>
-                <a:latin typeface="Montserrat"/>
-              </a:rPr>
-              <a:t>CONTADORES CENTRALIZADOS</a:t>
+              <a:rPr sz="1300" b="1" i="0">
+                <a:solidFill>
+                  <a:srgbClr val="E8801A"/>
+                </a:solidFill>
+                <a:latin typeface="Montserrat"/>
+              </a:rPr>
+              <a:t>PARTES DE ESTE VÍDEO</a:t>
             </a:r>
           </a:p>
         </p:txBody>
@@ -8292,7 +9214,7 @@
         </p:nvSpPr>
         <p:spPr>
           <a:xfrm>
-            <a:off x="822960" y="868680"/>
+            <a:off x="822960" y="914400"/>
             <a:ext cx="10515600" cy="914400"/>
           </a:xfrm>
           <a:prstGeom prst="rect">
@@ -8313,155 +9235,30 @@
                 </a:solidFill>
                 <a:latin typeface="Montserrat"/>
               </a:rPr>
-              <a:t>En obra nueva, contadores centralizados</a:t>
-            </a:r>
-          </a:p>
-        </p:txBody>
-      </p:sp>
-      <p:sp>
-        <p:nvSpPr>
-          <p:cNvPr id="7" name="TextBox 6"/>
-          <p:cNvSpPr txBox="1"/>
-          <p:nvPr/>
-        </p:nvSpPr>
-        <p:spPr>
-          <a:xfrm>
-            <a:off x="822960" y="1920240"/>
-            <a:ext cx="4983480" cy="4206240"/>
-          </a:xfrm>
-          <a:prstGeom prst="rect">
-            <a:avLst/>
-          </a:prstGeom>
-          <a:noFill/>
-        </p:spPr>
-        <p:txBody>
-          <a:bodyPr wrap="square">
-            <a:spAutoFit/>
-          </a:bodyPr>
-          <a:lstStyle/>
-          <a:p>
-            <a:pPr>
-              <a:spcAft>
-                <a:spcPts val="1000"/>
-              </a:spcAft>
-            </a:pPr>
-            <a:r>
-              <a:rPr sz="1600" b="1" i="0">
-                <a:solidFill>
-                  <a:srgbClr val="2E3A80"/>
-                </a:solidFill>
-                <a:latin typeface="Montserrat"/>
-              </a:rPr>
-              <a:t>•  </a:t>
-            </a:r>
-            <a:r>
-              <a:rPr sz="1600" b="0" i="0">
-                <a:solidFill>
-                  <a:srgbClr val="1B2330"/>
-                </a:solidFill>
-                <a:latin typeface="Montserrat"/>
-              </a:rPr>
-              <a:t>Obligatorio en edificios nuevos</a:t>
-            </a:r>
-          </a:p>
-          <a:p>
-            <a:pPr>
-              <a:spcAft>
-                <a:spcPts val="1000"/>
-              </a:spcAft>
-            </a:pPr>
-            <a:r>
-              <a:rPr sz="1600" b="1" i="0">
-                <a:solidFill>
-                  <a:srgbClr val="2E3A80"/>
-                </a:solidFill>
-                <a:latin typeface="Montserrat"/>
-              </a:rPr>
-              <a:t>•  </a:t>
-            </a:r>
-            <a:r>
-              <a:rPr sz="1600" b="0" i="0">
-                <a:solidFill>
-                  <a:srgbClr val="1B2330"/>
-                </a:solidFill>
-                <a:latin typeface="Montserrat"/>
-              </a:rPr>
-              <a:t>Zona comunitaria, accesibilidad grado 2</a:t>
-            </a:r>
-          </a:p>
-          <a:p>
-            <a:pPr>
-              <a:spcAft>
-                <a:spcPts val="1000"/>
-              </a:spcAft>
-            </a:pPr>
-            <a:r>
-              <a:rPr sz="1600" b="1" i="0">
-                <a:solidFill>
-                  <a:srgbClr val="2E3A80"/>
-                </a:solidFill>
-                <a:latin typeface="Montserrat"/>
-              </a:rPr>
-              <a:t>•  </a:t>
-            </a:r>
-            <a:r>
-              <a:rPr sz="1600" b="0" i="0">
-                <a:solidFill>
-                  <a:srgbClr val="1B2330"/>
-                </a:solidFill>
-                <a:latin typeface="Montserrat"/>
-              </a:rPr>
-              <a:t>Nunca bajo el primer sótano</a:t>
-            </a:r>
-          </a:p>
-          <a:p>
-            <a:pPr>
-              <a:spcAft>
-                <a:spcPts val="1000"/>
-              </a:spcAft>
-            </a:pPr>
-            <a:r>
-              <a:rPr sz="1600" b="1" i="0">
-                <a:solidFill>
-                  <a:srgbClr val="2E3A80"/>
-                </a:solidFill>
-                <a:latin typeface="Montserrat"/>
-              </a:rPr>
-              <a:t>•  </a:t>
-            </a:r>
-            <a:r>
-              <a:rPr sz="1600" b="0" i="0">
-                <a:solidFill>
-                  <a:srgbClr val="1B2330"/>
-                </a:solidFill>
-                <a:latin typeface="Montserrat"/>
-              </a:rPr>
-              <a:t>Recinto reservado solo para gas</a:t>
-            </a:r>
-          </a:p>
-        </p:txBody>
-      </p:sp>
-      <p:sp>
-        <p:nvSpPr>
-          <p:cNvPr id="8" name="imgph" descr="IMGQ:gas meter cabinet in building common area"/>
+              <a:t>En este vídeo</a:t>
+            </a:r>
+          </a:p>
+        </p:txBody>
+      </p:sp>
+      <p:sp>
+        <p:nvSpPr>
+          <p:cNvPr id="7" name="Rounded Rectangle 6"/>
           <p:cNvSpPr/>
           <p:nvPr/>
         </p:nvSpPr>
         <p:spPr>
           <a:xfrm>
-            <a:off x="5806440" y="1051560"/>
-            <a:ext cx="5298947" cy="4629150"/>
+            <a:off x="868680" y="1673352"/>
+            <a:ext cx="2011680" cy="73152"/>
           </a:xfrm>
           <a:prstGeom prst="roundRect">
             <a:avLst/>
           </a:prstGeom>
           <a:solidFill>
-            <a:srgbClr val="F3F6FB"/>
+            <a:srgbClr val="E8801A"/>
           </a:solidFill>
-          <a:ln w="12700">
-            <a:solidFill>
-              <a:srgbClr val="C7D2E6"/>
-            </a:solidFill>
+          <a:ln>
+            <a:noFill/>
           </a:ln>
           <a:effectLst/>
         </p:spPr>
@@ -8489,14 +9286,14 @@
       </p:sp>
       <p:sp>
         <p:nvSpPr>
-          <p:cNvPr id="9" name="TextBox 8"/>
+          <p:cNvPr id="8" name="TextBox 7"/>
           <p:cNvSpPr txBox="1"/>
           <p:nvPr/>
         </p:nvSpPr>
         <p:spPr>
           <a:xfrm>
-            <a:off x="6080760" y="2726055"/>
-            <a:ext cx="4750307" cy="1280160"/>
+            <a:off x="822960" y="2103120"/>
+            <a:ext cx="10515600" cy="4023360"/>
           </a:xfrm>
           <a:prstGeom prst="rect">
             <a:avLst/>
@@ -8509,27 +9306,228 @@
           </a:bodyPr>
           <a:lstStyle/>
           <a:p>
-            <a:pPr algn="ctr"/>
-            <a:r>
-              <a:rPr sz="1400" b="1" i="0">
-                <a:solidFill>
-                  <a:srgbClr val="64748B"/>
-                </a:solidFill>
-                <a:latin typeface="Montserrat"/>
-              </a:rPr>
-              <a:t>IMAGEN REALISTA</a:t>
-            </a:r>
-          </a:p>
-          <a:p>
-            <a:pPr algn="ctr"/>
-            <a:r>
-              <a:rPr sz="1100" b="0" i="1">
-                <a:solidFill>
-                  <a:srgbClr val="64748B"/>
-                </a:solidFill>
-                <a:latin typeface="Montserrat"/>
-              </a:rPr>
-              <a:t>gas meter cabinet in building common area</a:t>
+            <a:pPr>
+              <a:spcAft>
+                <a:spcPts val="900"/>
+              </a:spcAft>
+            </a:pPr>
+            <a:r>
+              <a:rPr sz="1800" b="1" i="0">
+                <a:solidFill>
+                  <a:srgbClr val="E8801A"/>
+                </a:solidFill>
+                <a:latin typeface="Montserrat"/>
+              </a:rPr>
+              <a:t>01   </a:t>
+            </a:r>
+            <a:r>
+              <a:rPr sz="1700" b="0" i="0">
+                <a:solidFill>
+                  <a:srgbClr val="1B2330"/>
+                </a:solidFill>
+                <a:latin typeface="Montserrat"/>
+              </a:rPr>
+              <a:t>Contadores centralizados</a:t>
+            </a:r>
+          </a:p>
+          <a:p>
+            <a:pPr>
+              <a:spcAft>
+                <a:spcPts val="900"/>
+              </a:spcAft>
+            </a:pPr>
+            <a:r>
+              <a:rPr sz="1800" b="1" i="0">
+                <a:solidFill>
+                  <a:srgbClr val="E8801A"/>
+                </a:solidFill>
+                <a:latin typeface="Montserrat"/>
+              </a:rPr>
+              <a:t>02   </a:t>
+            </a:r>
+            <a:r>
+              <a:rPr sz="1700" b="0" i="0">
+                <a:solidFill>
+                  <a:srgbClr val="1B2330"/>
+                </a:solidFill>
+                <a:latin typeface="Montserrat"/>
+              </a:rPr>
+              <a:t>Recinto de contadores</a:t>
+            </a:r>
+          </a:p>
+          <a:p>
+            <a:pPr>
+              <a:spcAft>
+                <a:spcPts val="900"/>
+              </a:spcAft>
+            </a:pPr>
+            <a:r>
+              <a:rPr sz="1800" b="1" i="0">
+                <a:solidFill>
+                  <a:srgbClr val="E8801A"/>
+                </a:solidFill>
+                <a:latin typeface="Montserrat"/>
+              </a:rPr>
+              <a:t>03   </a:t>
+            </a:r>
+            <a:r>
+              <a:rPr sz="1700" b="0" i="0">
+                <a:solidFill>
+                  <a:srgbClr val="1B2330"/>
+                </a:solidFill>
+                <a:latin typeface="Montserrat"/>
+              </a:rPr>
+              <a:t>Ventilación del recinto</a:t>
+            </a:r>
+          </a:p>
+          <a:p>
+            <a:pPr>
+              <a:spcAft>
+                <a:spcPts val="900"/>
+              </a:spcAft>
+            </a:pPr>
+            <a:r>
+              <a:rPr sz="1800" b="1" i="0">
+                <a:solidFill>
+                  <a:srgbClr val="E8801A"/>
+                </a:solidFill>
+                <a:latin typeface="Montserrat"/>
+              </a:rPr>
+              <a:t>04   </a:t>
+            </a:r>
+            <a:r>
+              <a:rPr sz="1700" b="0" i="0">
+                <a:solidFill>
+                  <a:srgbClr val="1B2330"/>
+                </a:solidFill>
+                <a:latin typeface="Montserrat"/>
+              </a:rPr>
+              <a:t>Conjuntos de regulación</a:t>
+            </a:r>
+          </a:p>
+          <a:p>
+            <a:pPr>
+              <a:spcAft>
+                <a:spcPts val="900"/>
+              </a:spcAft>
+            </a:pPr>
+            <a:r>
+              <a:rPr sz="1800" b="1" i="0">
+                <a:solidFill>
+                  <a:srgbClr val="E8801A"/>
+                </a:solidFill>
+                <a:latin typeface="Montserrat"/>
+              </a:rPr>
+              <a:t>05   </a:t>
+            </a:r>
+            <a:r>
+              <a:rPr sz="1700" b="0" i="0">
+                <a:solidFill>
+                  <a:srgbClr val="1B2330"/>
+                </a:solidFill>
+                <a:latin typeface="Montserrat"/>
+              </a:rPr>
+              <a:t>Contadores en vivienda</a:t>
+            </a:r>
+          </a:p>
+          <a:p>
+            <a:pPr>
+              <a:spcAft>
+                <a:spcPts val="900"/>
+              </a:spcAft>
+            </a:pPr>
+            <a:r>
+              <a:rPr sz="1800" b="1" i="0">
+                <a:solidFill>
+                  <a:srgbClr val="E8801A"/>
+                </a:solidFill>
+                <a:latin typeface="Montserrat"/>
+              </a:rPr>
+              <a:t>06   </a:t>
+            </a:r>
+            <a:r>
+              <a:rPr sz="1700" b="0" i="0">
+                <a:solidFill>
+                  <a:srgbClr val="1B2330"/>
+                </a:solidFill>
+                <a:latin typeface="Montserrat"/>
+              </a:rPr>
+              <a:t>Contador en vivienda</a:t>
+            </a:r>
+          </a:p>
+          <a:p>
+            <a:pPr>
+              <a:spcAft>
+                <a:spcPts val="900"/>
+              </a:spcAft>
+            </a:pPr>
+            <a:r>
+              <a:rPr sz="1800" b="1" i="0">
+                <a:solidFill>
+                  <a:srgbClr val="E8801A"/>
+                </a:solidFill>
+                <a:latin typeface="Montserrat"/>
+              </a:rPr>
+              <a:t>07   </a:t>
+            </a:r>
+            <a:r>
+              <a:rPr sz="1700" b="0" i="0">
+                <a:solidFill>
+                  <a:srgbClr val="1B2330"/>
+                </a:solidFill>
+                <a:latin typeface="Montserrat"/>
+              </a:rPr>
+              <a:t>Accesibilidad</a:t>
+            </a:r>
+          </a:p>
+          <a:p>
+            <a:pPr>
+              <a:spcAft>
+                <a:spcPts val="900"/>
+              </a:spcAft>
+            </a:pPr>
+            <a:r>
+              <a:rPr sz="1800" b="1" i="0">
+                <a:solidFill>
+                  <a:srgbClr val="E8801A"/>
+                </a:solidFill>
+                <a:latin typeface="Montserrat"/>
+              </a:rPr>
+              <a:t>08   </a:t>
+            </a:r>
+            <a:r>
+              <a:rPr sz="1700" b="0" i="0">
+                <a:solidFill>
+                  <a:srgbClr val="1B2330"/>
+                </a:solidFill>
+                <a:latin typeface="Montserrat"/>
+              </a:rPr>
+              <a:t>Reglas de accesibilidad</a:t>
+            </a:r>
+          </a:p>
+          <a:p>
+            <a:pPr>
+              <a:spcAft>
+                <a:spcPts val="900"/>
+              </a:spcAft>
+            </a:pPr>
+            <a:r>
+              <a:rPr sz="1800" b="1" i="0">
+                <a:solidFill>
+                  <a:srgbClr val="E8801A"/>
+                </a:solidFill>
+                <a:latin typeface="Montserrat"/>
+              </a:rPr>
+              <a:t>09   </a:t>
+            </a:r>
+            <a:r>
+              <a:rPr sz="1700" b="0" i="0">
+                <a:solidFill>
+                  <a:srgbClr val="1B2330"/>
+                </a:solidFill>
+                <a:latin typeface="Montserrat"/>
+              </a:rPr>
+              <a:t>IRC frente a IRI</a:t>
             </a:r>
           </a:p>
         </p:txBody>
@@ -8626,7 +9624,7 @@
                 </a:solidFill>
                 <a:latin typeface="Montserrat"/>
               </a:rPr>
-              <a:t>004 / 016</a:t>
+              <a:t>004 / 017</a:t>
             </a:r>
           </a:p>
         </p:txBody>
@@ -8674,7 +9672,7 @@
         <p:spPr>
           <a:xfrm>
             <a:off x="822960" y="457200"/>
-            <a:ext cx="8229600" cy="365760"/>
+            <a:ext cx="10058400" cy="365760"/>
           </a:xfrm>
           <a:prstGeom prst="rect">
             <a:avLst/>
@@ -8688,13 +9686,13 @@
           <a:lstStyle/>
           <a:p>
             <a:r>
-              <a:rPr sz="1200" b="1" i="0">
-                <a:solidFill>
-                  <a:srgbClr val="64748B"/>
-                </a:solidFill>
-                <a:latin typeface="Montserrat"/>
-              </a:rPr>
-              <a:t>RECINTO DE CONTADORES</a:t>
+              <a:rPr sz="1300" b="1" i="0">
+                <a:solidFill>
+                  <a:srgbClr val="E8801A"/>
+                </a:solidFill>
+                <a:latin typeface="Montserrat"/>
+              </a:rPr>
+              <a:t>CONTADORES CENTRALIZADOS</a:t>
             </a:r>
           </a:p>
         </p:txBody>
@@ -8722,26 +9720,70 @@
           <a:lstStyle/>
           <a:p>
             <a:r>
-              <a:rPr sz="2700" b="1" i="0">
+              <a:rPr sz="2800" b="1" i="0">
                 <a:solidFill>
                   <a:srgbClr val="1E2761"/>
                 </a:solidFill>
                 <a:latin typeface="Montserrat"/>
               </a:rPr>
-              <a:t>El totalizador, a la vista y a mano</a:t>
-            </a:r>
-          </a:p>
-        </p:txBody>
-      </p:sp>
-      <p:sp>
-        <p:nvSpPr>
-          <p:cNvPr id="7" name="TextBox 6"/>
+              <a:t>En obra nueva, contadores centralizados</a:t>
+            </a:r>
+          </a:p>
+        </p:txBody>
+      </p:sp>
+      <p:sp>
+        <p:nvSpPr>
+          <p:cNvPr id="7" name="Rounded Rectangle 6"/>
+          <p:cNvSpPr/>
+          <p:nvPr/>
+        </p:nvSpPr>
+        <p:spPr>
+          <a:xfrm>
+            <a:off x="868680" y="1627632"/>
+            <a:ext cx="2011680" cy="73152"/>
+          </a:xfrm>
+          <a:prstGeom prst="roundRect">
+            <a:avLst/>
+          </a:prstGeom>
+          <a:solidFill>
+            <a:srgbClr val="E8801A"/>
+          </a:solidFill>
+          <a:ln>
+            <a:noFill/>
+          </a:ln>
+          <a:effectLst/>
+        </p:spPr>
+        <p:style>
+          <a:lnRef idx="1">
+            <a:schemeClr val="accent1"/>
+          </a:lnRef>
+          <a:fillRef idx="3">
+            <a:schemeClr val="accent1"/>
+          </a:fillRef>
+          <a:effectRef idx="2">
+            <a:schemeClr val="accent1"/>
+          </a:effectRef>
+          <a:fontRef idx="minor">
+            <a:schemeClr val="lt1"/>
+          </a:fontRef>
+        </p:style>
+        <p:txBody>
+          <a:bodyPr rtlCol="0" anchor="ctr"/>
+          <a:lstStyle/>
+          <a:p>
+            <a:pPr algn="ctr"/>
+          </a:p>
+        </p:txBody>
+      </p:sp>
+      <p:sp>
+        <p:nvSpPr>
+          <p:cNvPr id="8" name="TextBox 7"/>
           <p:cNvSpPr txBox="1"/>
           <p:nvPr/>
         </p:nvSpPr>
         <p:spPr>
           <a:xfrm>
-            <a:off x="822960" y="1920240"/>
+            <a:off x="822960" y="1965960"/>
             <a:ext cx="4983480" cy="4206240"/>
           </a:xfrm>
           <a:prstGeom prst="rect">
@@ -8757,17 +9799,17 @@
           <a:p>
             <a:pPr>
               <a:spcAft>
-                <a:spcPts val="1000"/>
+                <a:spcPts val="1100"/>
               </a:spcAft>
             </a:pPr>
             <a:r>
               <a:rPr sz="1600" b="1" i="0">
                 <a:solidFill>
-                  <a:srgbClr val="2E3A80"/>
-                </a:solidFill>
-                <a:latin typeface="Montserrat"/>
-              </a:rPr>
-              <a:t>•  </a:t>
+                  <a:srgbClr val="E8801A"/>
+                </a:solidFill>
+                <a:latin typeface="Montserrat"/>
+              </a:rPr>
+              <a:t>▸  </a:t>
             </a:r>
             <a:r>
               <a:rPr sz="1600" b="0" i="0">
@@ -8776,23 +9818,23 @@
                 </a:solidFill>
                 <a:latin typeface="Montserrat"/>
               </a:rPr>
-              <a:t>Totalizador a menos de 2 m</a:t>
+              <a:t>Obligatorio en edificios nuevos</a:t>
             </a:r>
           </a:p>
           <a:p>
             <a:pPr>
               <a:spcAft>
-                <a:spcPts val="1000"/>
+                <a:spcPts val="1100"/>
               </a:spcAft>
             </a:pPr>
             <a:r>
               <a:rPr sz="1600" b="1" i="0">
                 <a:solidFill>
-                  <a:srgbClr val="2E3A80"/>
-                </a:solidFill>
-                <a:latin typeface="Montserrat"/>
-              </a:rPr>
-              <a:t>•  </a:t>
+                  <a:srgbClr val="E8801A"/>
+                </a:solidFill>
+                <a:latin typeface="Montserrat"/>
+              </a:rPr>
+              <a:t>▸  </a:t>
             </a:r>
             <a:r>
               <a:rPr sz="1600" b="0" i="0">
@@ -8801,23 +9843,23 @@
                 </a:solidFill>
                 <a:latin typeface="Montserrat"/>
               </a:rPr>
-              <a:t>Prefabricados UNE 60490: hasta 2,40 m</a:t>
+              <a:t>Zona comunitaria, accesibilidad grado 2</a:t>
             </a:r>
           </a:p>
           <a:p>
             <a:pPr>
               <a:spcAft>
-                <a:spcPts val="1000"/>
+                <a:spcPts val="1100"/>
               </a:spcAft>
             </a:pPr>
             <a:r>
               <a:rPr sz="1600" b="1" i="0">
                 <a:solidFill>
-                  <a:srgbClr val="2E3A80"/>
-                </a:solidFill>
-                <a:latin typeface="Montserrat"/>
-              </a:rPr>
-              <a:t>•  </a:t>
+                  <a:srgbClr val="E8801A"/>
+                </a:solidFill>
+                <a:latin typeface="Montserrat"/>
+              </a:rPr>
+              <a:t>▸  </a:t>
             </a:r>
             <a:r>
               <a:rPr sz="1600" b="0" i="0">
@@ -8826,23 +9868,23 @@
                 </a:solidFill>
                 <a:latin typeface="Montserrat"/>
               </a:rPr>
-              <a:t>Con escalera o útil de lectura</a:t>
+              <a:t>Nunca bajo el primer sótano</a:t>
             </a:r>
           </a:p>
           <a:p>
             <a:pPr>
               <a:spcAft>
-                <a:spcPts val="1000"/>
+                <a:spcPts val="1100"/>
               </a:spcAft>
             </a:pPr>
             <a:r>
               <a:rPr sz="1600" b="1" i="0">
                 <a:solidFill>
-                  <a:srgbClr val="2E3A80"/>
-                </a:solidFill>
-                <a:latin typeface="Montserrat"/>
-              </a:rPr>
-              <a:t>•  </a:t>
+                  <a:srgbClr val="E8801A"/>
+                </a:solidFill>
+                <a:latin typeface="Montserrat"/>
+              </a:rPr>
+              <a:t>▸  </a:t>
             </a:r>
             <a:r>
               <a:rPr sz="1600" b="0" i="0">
@@ -8851,14 +9893,14 @@
                 </a:solidFill>
                 <a:latin typeface="Montserrat"/>
               </a:rPr>
-              <a:t>Como el cuadro de la luz</a:t>
-            </a:r>
-          </a:p>
-        </p:txBody>
-      </p:sp>
-      <p:sp>
-        <p:nvSpPr>
-          <p:cNvPr id="8" name="imgph" descr="IMGQ:person reading gas meter dial"/>
+              <a:t>Recinto reservado solo para gas</a:t>
+            </a:r>
+          </a:p>
+        </p:txBody>
+      </p:sp>
+      <p:sp>
+        <p:nvSpPr>
+          <p:cNvPr id="9" name="imgph" descr="IMGQ:gas meter cabinet in building common area"/>
           <p:cNvSpPr/>
           <p:nvPr/>
         </p:nvSpPr>
@@ -8904,7 +9946,7 @@
       </p:sp>
       <p:sp>
         <p:nvSpPr>
-          <p:cNvPr id="9" name="TextBox 8"/>
+          <p:cNvPr id="10" name="TextBox 9"/>
           <p:cNvSpPr txBox="1"/>
           <p:nvPr/>
         </p:nvSpPr>
@@ -8944,7 +9986,7 @@
                 </a:solidFill>
                 <a:latin typeface="Montserrat"/>
               </a:rPr>
-              <a:t>person reading gas meter dial</a:t>
+              <a:t>gas meter cabinet in building common area</a:t>
             </a:r>
           </a:p>
         </p:txBody>
@@ -9041,7 +10083,7 @@
                 </a:solidFill>
                 <a:latin typeface="Montserrat"/>
               </a:rPr>
-              <a:t>005 / 016</a:t>
+              <a:t>005 / 017</a:t>
             </a:r>
           </a:p>
         </p:txBody>
@@ -9089,7 +10131,7 @@
         <p:spPr>
           <a:xfrm>
             <a:off x="822960" y="457200"/>
-            <a:ext cx="8229600" cy="365760"/>
+            <a:ext cx="10058400" cy="365760"/>
           </a:xfrm>
           <a:prstGeom prst="rect">
             <a:avLst/>
@@ -9103,9 +10145,9 @@
           <a:lstStyle/>
           <a:p>
             <a:r>
-              <a:rPr sz="1200" b="1" i="0">
-                <a:solidFill>
-                  <a:srgbClr val="64748B"/>
+              <a:rPr sz="1300" b="1" i="0">
+                <a:solidFill>
+                  <a:srgbClr val="E8801A"/>
                 </a:solidFill>
                 <a:latin typeface="Montserrat"/>
               </a:rPr>
@@ -9137,26 +10179,70 @@
           <a:lstStyle/>
           <a:p>
             <a:r>
-              <a:rPr sz="2700" b="1" i="0">
+              <a:rPr sz="2800" b="1" i="0">
                 <a:solidFill>
                   <a:srgbClr val="1E2761"/>
                 </a:solidFill>
                 <a:latin typeface="Montserrat"/>
               </a:rPr>
-              <a:t>Tres detalles del recinto que caen siempre</a:t>
-            </a:r>
-          </a:p>
-        </p:txBody>
-      </p:sp>
-      <p:sp>
-        <p:nvSpPr>
-          <p:cNvPr id="7" name="TextBox 6"/>
+              <a:t>El totalizador, a la vista y a mano</a:t>
+            </a:r>
+          </a:p>
+        </p:txBody>
+      </p:sp>
+      <p:sp>
+        <p:nvSpPr>
+          <p:cNvPr id="7" name="Rounded Rectangle 6"/>
+          <p:cNvSpPr/>
+          <p:nvPr/>
+        </p:nvSpPr>
+        <p:spPr>
+          <a:xfrm>
+            <a:off x="868680" y="1627632"/>
+            <a:ext cx="2011680" cy="73152"/>
+          </a:xfrm>
+          <a:prstGeom prst="roundRect">
+            <a:avLst/>
+          </a:prstGeom>
+          <a:solidFill>
+            <a:srgbClr val="E8801A"/>
+          </a:solidFill>
+          <a:ln>
+            <a:noFill/>
+          </a:ln>
+          <a:effectLst/>
+        </p:spPr>
+        <p:style>
+          <a:lnRef idx="1">
+            <a:schemeClr val="accent1"/>
+          </a:lnRef>
+          <a:fillRef idx="3">
+            <a:schemeClr val="accent1"/>
+          </a:fillRef>
+          <a:effectRef idx="2">
+            <a:schemeClr val="accent1"/>
+          </a:effectRef>
+          <a:fontRef idx="minor">
+            <a:schemeClr val="lt1"/>
+          </a:fontRef>
+        </p:style>
+        <p:txBody>
+          <a:bodyPr rtlCol="0" anchor="ctr"/>
+          <a:lstStyle/>
+          <a:p>
+            <a:pPr algn="ctr"/>
+          </a:p>
+        </p:txBody>
+      </p:sp>
+      <p:sp>
+        <p:nvSpPr>
+          <p:cNvPr id="8" name="TextBox 7"/>
           <p:cNvSpPr txBox="1"/>
           <p:nvPr/>
         </p:nvSpPr>
         <p:spPr>
           <a:xfrm>
-            <a:off x="822960" y="1920240"/>
+            <a:off x="822960" y="1965960"/>
             <a:ext cx="4983480" cy="4206240"/>
           </a:xfrm>
           <a:prstGeom prst="rect">
@@ -9172,17 +10258,17 @@
           <a:p>
             <a:pPr>
               <a:spcAft>
-                <a:spcPts val="1000"/>
+                <a:spcPts val="1100"/>
               </a:spcAft>
             </a:pPr>
             <a:r>
               <a:rPr sz="1600" b="1" i="0">
                 <a:solidFill>
-                  <a:srgbClr val="2E3A80"/>
-                </a:solidFill>
-                <a:latin typeface="Montserrat"/>
-              </a:rPr>
-              <a:t>•  </a:t>
+                  <a:srgbClr val="E8801A"/>
+                </a:solidFill>
+                <a:latin typeface="Montserrat"/>
+              </a:rPr>
+              <a:t>▸  </a:t>
             </a:r>
             <a:r>
               <a:rPr sz="1600" b="0" i="0">
@@ -9191,23 +10277,23 @@
                 </a:solidFill>
                 <a:latin typeface="Montserrat"/>
               </a:rPr>
-              <a:t>Puerta que abre hacia fuera</a:t>
+              <a:t>Totalizador a menos de 2 m</a:t>
             </a:r>
           </a:p>
           <a:p>
             <a:pPr>
               <a:spcAft>
-                <a:spcPts val="1000"/>
+                <a:spcPts val="1100"/>
               </a:spcAft>
             </a:pPr>
             <a:r>
               <a:rPr sz="1600" b="1" i="0">
                 <a:solidFill>
-                  <a:srgbClr val="2E3A80"/>
-                </a:solidFill>
-                <a:latin typeface="Montserrat"/>
-              </a:rPr>
-              <a:t>•  </a:t>
+                  <a:srgbClr val="E8801A"/>
+                </a:solidFill>
+                <a:latin typeface="Montserrat"/>
+              </a:rPr>
+              <a:t>▸  </a:t>
             </a:r>
             <a:r>
               <a:rPr sz="1600" b="0" i="0">
@@ -9216,23 +10302,23 @@
                 </a:solidFill>
                 <a:latin typeface="Montserrat"/>
               </a:rPr>
-              <a:t>Desde dentro, sin llave</a:t>
+              <a:t>Prefabricados UNE 60490: hasta 2,40 m</a:t>
             </a:r>
           </a:p>
           <a:p>
             <a:pPr>
               <a:spcAft>
-                <a:spcPts val="1000"/>
+                <a:spcPts val="1100"/>
               </a:spcAft>
             </a:pPr>
             <a:r>
               <a:rPr sz="1600" b="1" i="0">
                 <a:solidFill>
-                  <a:srgbClr val="2E3A80"/>
-                </a:solidFill>
-                <a:latin typeface="Montserrat"/>
-              </a:rPr>
-              <a:t>•  </a:t>
+                  <a:srgbClr val="E8801A"/>
+                </a:solidFill>
+                <a:latin typeface="Montserrat"/>
+              </a:rPr>
+              <a:t>▸  </a:t>
             </a:r>
             <a:r>
               <a:rPr sz="1600" b="0" i="0">
@@ -9241,23 +10327,23 @@
                 </a:solidFill>
                 <a:latin typeface="Montserrat"/>
               </a:rPr>
-              <a:t>Toma de corriente en locales técnicos</a:t>
+              <a:t>Con escalera o útil de lectura</a:t>
             </a:r>
           </a:p>
           <a:p>
             <a:pPr>
               <a:spcAft>
-                <a:spcPts val="1000"/>
+                <a:spcPts val="1100"/>
               </a:spcAft>
             </a:pPr>
             <a:r>
               <a:rPr sz="1600" b="1" i="0">
                 <a:solidFill>
-                  <a:srgbClr val="2E3A80"/>
-                </a:solidFill>
-                <a:latin typeface="Montserrat"/>
-              </a:rPr>
-              <a:t>•  </a:t>
+                  <a:srgbClr val="E8801A"/>
+                </a:solidFill>
+                <a:latin typeface="Montserrat"/>
+              </a:rPr>
+              <a:t>▸  </a:t>
             </a:r>
             <a:r>
               <a:rPr sz="1600" b="0" i="0">
@@ -9266,14 +10352,14 @@
                 </a:solidFill>
                 <a:latin typeface="Montserrat"/>
               </a:rPr>
-              <a:t>Rótulo «Contadores de gas»</a:t>
-            </a:r>
-          </a:p>
-        </p:txBody>
-      </p:sp>
-      <p:sp>
-        <p:nvSpPr>
-          <p:cNvPr id="8" name="imgph" descr="IMGQ:metal utility door opening outward with sign"/>
+              <a:t>Como el cuadro de la luz</a:t>
+            </a:r>
+          </a:p>
+        </p:txBody>
+      </p:sp>
+      <p:sp>
+        <p:nvSpPr>
+          <p:cNvPr id="9" name="imgph" descr="IMGQ:person reading gas meter dial"/>
           <p:cNvSpPr/>
           <p:nvPr/>
         </p:nvSpPr>
@@ -9319,7 +10405,7 @@
       </p:sp>
       <p:sp>
         <p:nvSpPr>
-          <p:cNvPr id="9" name="TextBox 8"/>
+          <p:cNvPr id="10" name="TextBox 9"/>
           <p:cNvSpPr txBox="1"/>
           <p:nvPr/>
         </p:nvSpPr>
@@ -9359,7 +10445,7 @@
                 </a:solidFill>
                 <a:latin typeface="Montserrat"/>
               </a:rPr>
-              <a:t>metal utility door opening outward with sign</a:t>
+              <a:t>person reading gas meter dial</a:t>
             </a:r>
           </a:p>
         </p:txBody>
@@ -9456,7 +10542,7 @@
                 </a:solidFill>
                 <a:latin typeface="Montserrat"/>
               </a:rPr>
-              <a:t>006 / 016</a:t>
+              <a:t>006 / 017</a:t>
             </a:r>
           </a:p>
         </p:txBody>
@@ -9504,7 +10590,7 @@
         <p:spPr>
           <a:xfrm>
             <a:off x="822960" y="457200"/>
-            <a:ext cx="8229600" cy="365760"/>
+            <a:ext cx="10058400" cy="365760"/>
           </a:xfrm>
           <a:prstGeom prst="rect">
             <a:avLst/>
@@ -9518,9 +10604,9 @@
           <a:lstStyle/>
           <a:p>
             <a:r>
-              <a:rPr sz="1200" b="1" i="0">
-                <a:solidFill>
-                  <a:srgbClr val="64748B"/>
+              <a:rPr sz="1300" b="1" i="0">
+                <a:solidFill>
+                  <a:srgbClr val="E8801A"/>
                 </a:solidFill>
                 <a:latin typeface="Montserrat"/>
               </a:rPr>
@@ -9552,26 +10638,70 @@
           <a:lstStyle/>
           <a:p>
             <a:r>
-              <a:rPr sz="2700" b="1" i="0">
+              <a:rPr sz="2800" b="1" i="0">
                 <a:solidFill>
                   <a:srgbClr val="1E2761"/>
                 </a:solidFill>
                 <a:latin typeface="Montserrat"/>
               </a:rPr>
-              <a:t>Solo gas: cuidado con otras conducciones</a:t>
-            </a:r>
-          </a:p>
-        </p:txBody>
-      </p:sp>
-      <p:sp>
-        <p:nvSpPr>
-          <p:cNvPr id="7" name="TextBox 6"/>
+              <a:t>Tres detalles del recinto que caen siempre</a:t>
+            </a:r>
+          </a:p>
+        </p:txBody>
+      </p:sp>
+      <p:sp>
+        <p:nvSpPr>
+          <p:cNvPr id="7" name="Rounded Rectangle 6"/>
+          <p:cNvSpPr/>
+          <p:nvPr/>
+        </p:nvSpPr>
+        <p:spPr>
+          <a:xfrm>
+            <a:off x="868680" y="1627632"/>
+            <a:ext cx="2011680" cy="73152"/>
+          </a:xfrm>
+          <a:prstGeom prst="roundRect">
+            <a:avLst/>
+          </a:prstGeom>
+          <a:solidFill>
+            <a:srgbClr val="E8801A"/>
+          </a:solidFill>
+          <a:ln>
+            <a:noFill/>
+          </a:ln>
+          <a:effectLst/>
+        </p:spPr>
+        <p:style>
+          <a:lnRef idx="1">
+            <a:schemeClr val="accent1"/>
+          </a:lnRef>
+          <a:fillRef idx="3">
+            <a:schemeClr val="accent1"/>
+          </a:fillRef>
+          <a:effectRef idx="2">
+            <a:schemeClr val="accent1"/>
+          </a:effectRef>
+          <a:fontRef idx="minor">
+            <a:schemeClr val="lt1"/>
+          </a:fontRef>
+        </p:style>
+        <p:txBody>
+          <a:bodyPr rtlCol="0" anchor="ctr"/>
+          <a:lstStyle/>
+          <a:p>
+            <a:pPr algn="ctr"/>
+          </a:p>
+        </p:txBody>
+      </p:sp>
+      <p:sp>
+        <p:nvSpPr>
+          <p:cNvPr id="8" name="TextBox 7"/>
           <p:cNvSpPr txBox="1"/>
           <p:nvPr/>
         </p:nvSpPr>
         <p:spPr>
           <a:xfrm>
-            <a:off x="822960" y="1920240"/>
+            <a:off x="822960" y="1965960"/>
             <a:ext cx="4983480" cy="4206240"/>
           </a:xfrm>
           <a:prstGeom prst="rect">
@@ -9587,17 +10717,17 @@
           <a:p>
             <a:pPr>
               <a:spcAft>
-                <a:spcPts val="1000"/>
+                <a:spcPts val="1100"/>
               </a:spcAft>
             </a:pPr>
             <a:r>
               <a:rPr sz="1600" b="1" i="0">
                 <a:solidFill>
-                  <a:srgbClr val="2E3A80"/>
-                </a:solidFill>
-                <a:latin typeface="Montserrat"/>
-              </a:rPr>
-              <a:t>•  </a:t>
+                  <a:srgbClr val="E8801A"/>
+                </a:solidFill>
+                <a:latin typeface="Montserrat"/>
+              </a:rPr>
+              <a:t>▸  </a:t>
             </a:r>
             <a:r>
               <a:rPr sz="1600" b="0" i="0">
@@ -9606,23 +10736,23 @@
                 </a:solidFill>
                 <a:latin typeface="Montserrat"/>
               </a:rPr>
-              <a:t>Recinto reservado solo para gas</a:t>
+              <a:t>Puerta que abre hacia fuera</a:t>
             </a:r>
           </a:p>
           <a:p>
             <a:pPr>
               <a:spcAft>
-                <a:spcPts val="1000"/>
+                <a:spcPts val="1100"/>
               </a:spcAft>
             </a:pPr>
             <a:r>
               <a:rPr sz="1600" b="1" i="0">
                 <a:solidFill>
-                  <a:srgbClr val="2E3A80"/>
-                </a:solidFill>
-                <a:latin typeface="Montserrat"/>
-              </a:rPr>
-              <a:t>•  </a:t>
+                  <a:srgbClr val="E8801A"/>
+                </a:solidFill>
+                <a:latin typeface="Montserrat"/>
+              </a:rPr>
+              <a:t>▸  </a:t>
             </a:r>
             <a:r>
               <a:rPr sz="1600" b="0" i="0">
@@ -9631,23 +10761,23 @@
                 </a:solidFill>
                 <a:latin typeface="Montserrat"/>
               </a:rPr>
-              <a:t>Evitar conducciones ajenas vistas</a:t>
+              <a:t>Desde dentro, sin llave</a:t>
             </a:r>
           </a:p>
           <a:p>
             <a:pPr>
               <a:spcAft>
-                <a:spcPts val="1000"/>
+                <a:spcPts val="1100"/>
               </a:spcAft>
             </a:pPr>
             <a:r>
               <a:rPr sz="1600" b="1" i="0">
                 <a:solidFill>
-                  <a:srgbClr val="2E3A80"/>
-                </a:solidFill>
-                <a:latin typeface="Montserrat"/>
-              </a:rPr>
-              <a:t>•  </a:t>
+                  <a:srgbClr val="E8801A"/>
+                </a:solidFill>
+                <a:latin typeface="Montserrat"/>
+              </a:rPr>
+              <a:t>▸  </a:t>
             </a:r>
             <a:r>
               <a:rPr sz="1600" b="0" i="0">
@@ -9656,23 +10786,23 @@
                 </a:solidFill>
                 <a:latin typeface="Montserrat"/>
               </a:rPr>
-              <a:t>Si cruzan: estancas y sin juntas desmontables</a:t>
+              <a:t>Toma de corriente en locales técnicos</a:t>
             </a:r>
           </a:p>
           <a:p>
             <a:pPr>
               <a:spcAft>
-                <a:spcPts val="1000"/>
+                <a:spcPts val="1100"/>
               </a:spcAft>
             </a:pPr>
             <a:r>
               <a:rPr sz="1600" b="1" i="0">
                 <a:solidFill>
-                  <a:srgbClr val="2E3A80"/>
-                </a:solidFill>
-                <a:latin typeface="Montserrat"/>
-              </a:rPr>
-              <a:t>•  </a:t>
+                  <a:srgbClr val="E8801A"/>
+                </a:solidFill>
+                <a:latin typeface="Montserrat"/>
+              </a:rPr>
+              <a:t>▸  </a:t>
             </a:r>
             <a:r>
               <a:rPr sz="1600" b="0" i="0">
@@ -9681,14 +10811,14 @@
                 </a:solidFill>
                 <a:latin typeface="Montserrat"/>
               </a:rPr>
-              <a:t>Eléctrico visto: vaina continua de acero</a:t>
-            </a:r>
-          </a:p>
-        </p:txBody>
-      </p:sp>
-      <p:sp>
-        <p:nvSpPr>
-          <p:cNvPr id="8" name="imgph" descr="IMGQ:electrical conduit pipes on wall"/>
+              <a:t>Rótulo «Contadores de gas»</a:t>
+            </a:r>
+          </a:p>
+        </p:txBody>
+      </p:sp>
+      <p:sp>
+        <p:nvSpPr>
+          <p:cNvPr id="9" name="imgph" descr="IMGQ:metal utility door opening outward with sign"/>
           <p:cNvSpPr/>
           <p:nvPr/>
         </p:nvSpPr>
@@ -9734,7 +10864,7 @@
       </p:sp>
       <p:sp>
         <p:nvSpPr>
-          <p:cNvPr id="9" name="TextBox 8"/>
+          <p:cNvPr id="10" name="TextBox 9"/>
           <p:cNvSpPr txBox="1"/>
           <p:nvPr/>
         </p:nvSpPr>
@@ -9774,7 +10904,7 @@
                 </a:solidFill>
                 <a:latin typeface="Montserrat"/>
               </a:rPr>
-              <a:t>electrical conduit pipes on wall</a:t>
+              <a:t>metal utility door opening outward with sign</a:t>
             </a:r>
           </a:p>
         </p:txBody>
@@ -9871,7 +11001,7 @@
                 </a:solidFill>
                 <a:latin typeface="Montserrat"/>
               </a:rPr>
-              <a:t>007 / 016</a:t>
+              <a:t>007 / 017</a:t>
             </a:r>
           </a:p>
         </p:txBody>
@@ -9919,7 +11049,7 @@
         <p:spPr>
           <a:xfrm>
             <a:off x="822960" y="457200"/>
-            <a:ext cx="8229600" cy="365760"/>
+            <a:ext cx="10058400" cy="365760"/>
           </a:xfrm>
           <a:prstGeom prst="rect">
             <a:avLst/>
@@ -9933,13 +11063,13 @@
           <a:lstStyle/>
           <a:p>
             <a:r>
-              <a:rPr sz="1200" b="1" i="0">
-                <a:solidFill>
-                  <a:srgbClr val="64748B"/>
-                </a:solidFill>
-                <a:latin typeface="Montserrat"/>
-              </a:rPr>
-              <a:t>VENTILACIÓN DEL RECINTO</a:t>
+              <a:rPr sz="1300" b="1" i="0">
+                <a:solidFill>
+                  <a:srgbClr val="E8801A"/>
+                </a:solidFill>
+                <a:latin typeface="Montserrat"/>
+              </a:rPr>
+              <a:t>RECINTO DE CONTADORES</a:t>
             </a:r>
           </a:p>
         </p:txBody>
@@ -9967,26 +11097,70 @@
           <a:lstStyle/>
           <a:p>
             <a:r>
-              <a:rPr sz="2700" b="1" i="0">
+              <a:rPr sz="2800" b="1" i="0">
                 <a:solidFill>
                   <a:srgbClr val="1E2761"/>
                 </a:solidFill>
                 <a:latin typeface="Montserrat"/>
               </a:rPr>
-              <a:t>Directa o indirecta: por dónde sale el aire</a:t>
-            </a:r>
-          </a:p>
-        </p:txBody>
-      </p:sp>
-      <p:sp>
-        <p:nvSpPr>
-          <p:cNvPr id="7" name="TextBox 6"/>
+              <a:t>Solo gas: cuidado con otras conducciones</a:t>
+            </a:r>
+          </a:p>
+        </p:txBody>
+      </p:sp>
+      <p:sp>
+        <p:nvSpPr>
+          <p:cNvPr id="7" name="Rounded Rectangle 6"/>
+          <p:cNvSpPr/>
+          <p:nvPr/>
+        </p:nvSpPr>
+        <p:spPr>
+          <a:xfrm>
+            <a:off x="868680" y="1627632"/>
+            <a:ext cx="2011680" cy="73152"/>
+          </a:xfrm>
+          <a:prstGeom prst="roundRect">
+            <a:avLst/>
+          </a:prstGeom>
+          <a:solidFill>
+            <a:srgbClr val="E8801A"/>
+          </a:solidFill>
+          <a:ln>
+            <a:noFill/>
+          </a:ln>
+          <a:effectLst/>
+        </p:spPr>
+        <p:style>
+          <a:lnRef idx="1">
+            <a:schemeClr val="accent1"/>
+          </a:lnRef>
+          <a:fillRef idx="3">
+            <a:schemeClr val="accent1"/>
+          </a:fillRef>
+          <a:effectRef idx="2">
+            <a:schemeClr val="accent1"/>
+          </a:effectRef>
+          <a:fontRef idx="minor">
+            <a:schemeClr val="lt1"/>
+          </a:fontRef>
+        </p:style>
+        <p:txBody>
+          <a:bodyPr rtlCol="0" anchor="ctr"/>
+          <a:lstStyle/>
+          <a:p>
+            <a:pPr algn="ctr"/>
+          </a:p>
+        </p:txBody>
+      </p:sp>
+      <p:sp>
+        <p:nvSpPr>
+          <p:cNvPr id="8" name="TextBox 7"/>
           <p:cNvSpPr txBox="1"/>
           <p:nvPr/>
         </p:nvSpPr>
         <p:spPr>
           <a:xfrm>
-            <a:off x="822960" y="1920240"/>
+            <a:off x="822960" y="1965960"/>
             <a:ext cx="4983480" cy="4206240"/>
           </a:xfrm>
           <a:prstGeom prst="rect">
@@ -10002,17 +11176,17 @@
           <a:p>
             <a:pPr>
               <a:spcAft>
-                <a:spcPts val="1000"/>
+                <a:spcPts val="1100"/>
               </a:spcAft>
             </a:pPr>
             <a:r>
               <a:rPr sz="1600" b="1" i="0">
                 <a:solidFill>
-                  <a:srgbClr val="2E3A80"/>
-                </a:solidFill>
-                <a:latin typeface="Montserrat"/>
-              </a:rPr>
-              <a:t>•  </a:t>
+                  <a:srgbClr val="E8801A"/>
+                </a:solidFill>
+                <a:latin typeface="Montserrat"/>
+              </a:rPr>
+              <a:t>▸  </a:t>
             </a:r>
             <a:r>
               <a:rPr sz="1600" b="0" i="0">
@@ -10021,23 +11195,23 @@
                 </a:solidFill>
                 <a:latin typeface="Montserrat"/>
               </a:rPr>
-              <a:t>Directa: al exterior sin escalas</a:t>
+              <a:t>Recinto reservado solo para gas</a:t>
             </a:r>
           </a:p>
           <a:p>
             <a:pPr>
               <a:spcAft>
-                <a:spcPts val="1000"/>
+                <a:spcPts val="1100"/>
               </a:spcAft>
             </a:pPr>
             <a:r>
               <a:rPr sz="1600" b="1" i="0">
                 <a:solidFill>
-                  <a:srgbClr val="2E3A80"/>
-                </a:solidFill>
-                <a:latin typeface="Montserrat"/>
-              </a:rPr>
-              <a:t>•  </a:t>
+                  <a:srgbClr val="E8801A"/>
+                </a:solidFill>
+                <a:latin typeface="Montserrat"/>
+              </a:rPr>
+              <a:t>▸  </a:t>
             </a:r>
             <a:r>
               <a:rPr sz="1600" b="0" i="0">
@@ -10046,23 +11220,23 @@
                 </a:solidFill>
                 <a:latin typeface="Montserrat"/>
               </a:rPr>
-              <a:t>Indirecta: pasa por otro local</a:t>
+              <a:t>Evitar conducciones ajenas vistas</a:t>
             </a:r>
           </a:p>
           <a:p>
             <a:pPr>
               <a:spcAft>
-                <a:spcPts val="1000"/>
+                <a:spcPts val="1100"/>
               </a:spcAft>
             </a:pPr>
             <a:r>
               <a:rPr sz="1600" b="1" i="0">
                 <a:solidFill>
-                  <a:srgbClr val="2E3A80"/>
-                </a:solidFill>
-                <a:latin typeface="Montserrat"/>
-              </a:rPr>
-              <a:t>•  </a:t>
+                  <a:srgbClr val="E8801A"/>
+                </a:solidFill>
+                <a:latin typeface="Montserrat"/>
+              </a:rPr>
+              <a:t>▸  </a:t>
             </a:r>
             <a:r>
               <a:rPr sz="1600" b="0" i="0">
@@ -10071,14 +11245,39 @@
                 </a:solidFill>
                 <a:latin typeface="Montserrat"/>
               </a:rPr>
-              <a:t>En sótano con gas ligero: solo directa</a:t>
-            </a:r>
-          </a:p>
-        </p:txBody>
-      </p:sp>
-      <p:sp>
-        <p:nvSpPr>
-          <p:cNvPr id="8" name="imgph" descr="IMGQ:air vent grille exterior wall"/>
+              <a:t>Si cruzan: estancas y sin juntas desmontables</a:t>
+            </a:r>
+          </a:p>
+          <a:p>
+            <a:pPr>
+              <a:spcAft>
+                <a:spcPts val="1100"/>
+              </a:spcAft>
+            </a:pPr>
+            <a:r>
+              <a:rPr sz="1600" b="1" i="0">
+                <a:solidFill>
+                  <a:srgbClr val="E8801A"/>
+                </a:solidFill>
+                <a:latin typeface="Montserrat"/>
+              </a:rPr>
+              <a:t>▸  </a:t>
+            </a:r>
+            <a:r>
+              <a:rPr sz="1600" b="0" i="0">
+                <a:solidFill>
+                  <a:srgbClr val="1B2330"/>
+                </a:solidFill>
+                <a:latin typeface="Montserrat"/>
+              </a:rPr>
+              <a:t>Eléctrico visto: vaina continua de acero</a:t>
+            </a:r>
+          </a:p>
+        </p:txBody>
+      </p:sp>
+      <p:sp>
+        <p:nvSpPr>
+          <p:cNvPr id="9" name="imgph" descr="IMGQ:electrical conduit pipes on wall"/>
           <p:cNvSpPr/>
           <p:nvPr/>
         </p:nvSpPr>
@@ -10124,7 +11323,7 @@
       </p:sp>
       <p:sp>
         <p:nvSpPr>
-          <p:cNvPr id="9" name="TextBox 8"/>
+          <p:cNvPr id="10" name="TextBox 9"/>
           <p:cNvSpPr txBox="1"/>
           <p:nvPr/>
         </p:nvSpPr>
@@ -10164,7 +11363,7 @@
                 </a:solidFill>
                 <a:latin typeface="Montserrat"/>
               </a:rPr>
-              <a:t>air vent grille exterior wall</a:t>
+              <a:t>electrical conduit pipes on wall</a:t>
             </a:r>
           </a:p>
         </p:txBody>
@@ -10261,7 +11460,7 @@
                 </a:solidFill>
                 <a:latin typeface="Montserrat"/>
               </a:rPr>
-              <a:t>008 / 016</a:t>
+              <a:t>008 / 017</a:t>
             </a:r>
           </a:p>
         </p:txBody>
@@ -10309,7 +11508,7 @@
         <p:spPr>
           <a:xfrm>
             <a:off x="822960" y="457200"/>
-            <a:ext cx="8229600" cy="365760"/>
+            <a:ext cx="10058400" cy="365760"/>
           </a:xfrm>
           <a:prstGeom prst="rect">
             <a:avLst/>
@@ -10323,9 +11522,9 @@
           <a:lstStyle/>
           <a:p>
             <a:r>
-              <a:rPr sz="1200" b="1" i="0">
-                <a:solidFill>
-                  <a:srgbClr val="64748B"/>
+              <a:rPr sz="1300" b="1" i="0">
+                <a:solidFill>
+                  <a:srgbClr val="E8801A"/>
                 </a:solidFill>
                 <a:latin typeface="Montserrat"/>
               </a:rPr>
@@ -10357,26 +11556,70 @@
           <a:lstStyle/>
           <a:p>
             <a:r>
-              <a:rPr sz="2700" b="1" i="0">
+              <a:rPr sz="2800" b="1" i="0">
                 <a:solidFill>
                   <a:srgbClr val="1E2761"/>
                 </a:solidFill>
                 <a:latin typeface="Montserrat"/>
               </a:rPr>
-              <a:t>Ventilar el recinto es evitar una bolsa de gas</a:t>
-            </a:r>
-          </a:p>
-        </p:txBody>
-      </p:sp>
-      <p:sp>
-        <p:nvSpPr>
-          <p:cNvPr id="7" name="TextBox 6"/>
+              <a:t>Directa o indirecta: por dónde sale el aire</a:t>
+            </a:r>
+          </a:p>
+        </p:txBody>
+      </p:sp>
+      <p:sp>
+        <p:nvSpPr>
+          <p:cNvPr id="7" name="Rounded Rectangle 6"/>
+          <p:cNvSpPr/>
+          <p:nvPr/>
+        </p:nvSpPr>
+        <p:spPr>
+          <a:xfrm>
+            <a:off x="868680" y="1627632"/>
+            <a:ext cx="2011680" cy="73152"/>
+          </a:xfrm>
+          <a:prstGeom prst="roundRect">
+            <a:avLst/>
+          </a:prstGeom>
+          <a:solidFill>
+            <a:srgbClr val="E8801A"/>
+          </a:solidFill>
+          <a:ln>
+            <a:noFill/>
+          </a:ln>
+          <a:effectLst/>
+        </p:spPr>
+        <p:style>
+          <a:lnRef idx="1">
+            <a:schemeClr val="accent1"/>
+          </a:lnRef>
+          <a:fillRef idx="3">
+            <a:schemeClr val="accent1"/>
+          </a:fillRef>
+          <a:effectRef idx="2">
+            <a:schemeClr val="accent1"/>
+          </a:effectRef>
+          <a:fontRef idx="minor">
+            <a:schemeClr val="lt1"/>
+          </a:fontRef>
+        </p:style>
+        <p:txBody>
+          <a:bodyPr rtlCol="0" anchor="ctr"/>
+          <a:lstStyle/>
+          <a:p>
+            <a:pPr algn="ctr"/>
+          </a:p>
+        </p:txBody>
+      </p:sp>
+      <p:sp>
+        <p:nvSpPr>
+          <p:cNvPr id="8" name="TextBox 7"/>
           <p:cNvSpPr txBox="1"/>
           <p:nvPr/>
         </p:nvSpPr>
         <p:spPr>
           <a:xfrm>
-            <a:off x="822960" y="1920240"/>
+            <a:off x="822960" y="1965960"/>
             <a:ext cx="4983480" cy="4206240"/>
           </a:xfrm>
           <a:prstGeom prst="rect">
@@ -10392,17 +11635,17 @@
           <a:p>
             <a:pPr>
               <a:spcAft>
-                <a:spcPts val="1000"/>
+                <a:spcPts val="1100"/>
               </a:spcAft>
             </a:pPr>
             <a:r>
               <a:rPr sz="1600" b="1" i="0">
                 <a:solidFill>
-                  <a:srgbClr val="2E3A80"/>
-                </a:solidFill>
-                <a:latin typeface="Montserrat"/>
-              </a:rPr>
-              <a:t>•  </a:t>
+                  <a:srgbClr val="E8801A"/>
+                </a:solidFill>
+                <a:latin typeface="Montserrat"/>
+              </a:rPr>
+              <a:t>▸  </a:t>
             </a:r>
             <a:r>
               <a:rPr sz="1600" b="0" i="0">
@@ -10411,23 +11654,23 @@
                 </a:solidFill>
                 <a:latin typeface="Montserrat"/>
               </a:rPr>
-              <a:t>Armarios: 5–50 cm², sin indirecta</a:t>
+              <a:t>Directa: al exterior sin escalas</a:t>
             </a:r>
           </a:p>
           <a:p>
             <a:pPr>
               <a:spcAft>
-                <a:spcPts val="1000"/>
+                <a:spcPts val="1100"/>
               </a:spcAft>
             </a:pPr>
             <a:r>
               <a:rPr sz="1600" b="1" i="0">
                 <a:solidFill>
-                  <a:srgbClr val="2E3A80"/>
-                </a:solidFill>
-                <a:latin typeface="Montserrat"/>
-              </a:rPr>
-              <a:t>•  </a:t>
+                  <a:srgbClr val="E8801A"/>
+                </a:solidFill>
+                <a:latin typeface="Montserrat"/>
+              </a:rPr>
+              <a:t>▸  </a:t>
             </a:r>
             <a:r>
               <a:rPr sz="1600" b="0" i="0">
@@ -10436,23 +11679,23 @@
                 </a:solidFill>
                 <a:latin typeface="Montserrat"/>
               </a:rPr>
-              <a:t>Locales y cuartos: 200/150 cm²</a:t>
+              <a:t>Indirecta: pasa por otro local</a:t>
             </a:r>
           </a:p>
           <a:p>
             <a:pPr>
               <a:spcAft>
-                <a:spcPts val="1000"/>
+                <a:spcPts val="1100"/>
               </a:spcAft>
             </a:pPr>
             <a:r>
               <a:rPr sz="1600" b="1" i="0">
                 <a:solidFill>
-                  <a:srgbClr val="2E3A80"/>
-                </a:solidFill>
-                <a:latin typeface="Montserrat"/>
-              </a:rPr>
-              <a:t>•  </a:t>
+                  <a:srgbClr val="E8801A"/>
+                </a:solidFill>
+                <a:latin typeface="Montserrat"/>
+              </a:rPr>
+              <a:t>▸  </a:t>
             </a:r>
             <a:r>
               <a:rPr sz="1600" b="0" i="0">
@@ -10461,39 +11704,14 @@
                 </a:solidFill>
                 <a:latin typeface="Montserrat"/>
               </a:rPr>
-              <a:t>+50 % si el conducto es largo</a:t>
-            </a:r>
-          </a:p>
-          <a:p>
-            <a:pPr>
-              <a:spcAft>
-                <a:spcPts val="1000"/>
-              </a:spcAft>
-            </a:pPr>
-            <a:r>
-              <a:rPr sz="1600" b="1" i="0">
-                <a:solidFill>
-                  <a:srgbClr val="2E3A80"/>
-                </a:solidFill>
-                <a:latin typeface="Montserrat"/>
-              </a:rPr>
-              <a:t>•  </a:t>
-            </a:r>
-            <a:r>
-              <a:rPr sz="1600" b="0" i="0">
-                <a:solidFill>
-                  <a:srgbClr val="1B2330"/>
-                </a:solidFill>
-                <a:latin typeface="Montserrat"/>
-              </a:rPr>
-              <a:t>+50 % y puerta estanca en sótano</a:t>
-            </a:r>
-          </a:p>
-        </p:txBody>
-      </p:sp>
-      <p:sp>
-        <p:nvSpPr>
-          <p:cNvPr id="8" name="imgph" descr="IMGQ:wall ventilation grille louver metal"/>
+              <a:t>En sótano con gas ligero: solo directa</a:t>
+            </a:r>
+          </a:p>
+        </p:txBody>
+      </p:sp>
+      <p:sp>
+        <p:nvSpPr>
+          <p:cNvPr id="9" name="imgph" descr="IMGQ:air vent grille exterior wall"/>
           <p:cNvSpPr/>
           <p:nvPr/>
         </p:nvSpPr>
@@ -10539,7 +11757,7 @@
       </p:sp>
       <p:sp>
         <p:nvSpPr>
-          <p:cNvPr id="9" name="TextBox 8"/>
+          <p:cNvPr id="10" name="TextBox 9"/>
           <p:cNvSpPr txBox="1"/>
           <p:nvPr/>
         </p:nvSpPr>
@@ -10579,7 +11797,7 @@
                 </a:solidFill>
                 <a:latin typeface="Montserrat"/>
               </a:rPr>
-              <a:t>wall ventilation grille louver metal</a:t>
+              <a:t>air vent grille exterior wall</a:t>
             </a:r>
           </a:p>
         </p:txBody>
@@ -10676,7 +11894,7 @@
                 </a:solidFill>
                 <a:latin typeface="Montserrat"/>
               </a:rPr>
-              <a:t>009 / 016</a:t>
+              <a:t>009 / 017</a:t>
             </a:r>
           </a:p>
         </p:txBody>
@@ -10724,7 +11942,7 @@
         <p:spPr>
           <a:xfrm>
             <a:off x="822960" y="457200"/>
-            <a:ext cx="8229600" cy="365760"/>
+            <a:ext cx="10058400" cy="365760"/>
           </a:xfrm>
           <a:prstGeom prst="rect">
             <a:avLst/>
@@ -10738,13 +11956,13 @@
           <a:lstStyle/>
           <a:p>
             <a:r>
-              <a:rPr sz="1200" b="1" i="0">
-                <a:solidFill>
-                  <a:srgbClr val="64748B"/>
-                </a:solidFill>
-                <a:latin typeface="Montserrat"/>
-              </a:rPr>
-              <a:t>CONJUNTOS DE REGULACIÓN</a:t>
+              <a:rPr sz="1300" b="1" i="0">
+                <a:solidFill>
+                  <a:srgbClr val="E8801A"/>
+                </a:solidFill>
+                <a:latin typeface="Montserrat"/>
+              </a:rPr>
+              <a:t>VENTILACIÓN DEL RECINTO</a:t>
             </a:r>
           </a:p>
         </p:txBody>
@@ -10772,26 +11990,70 @@
           <a:lstStyle/>
           <a:p>
             <a:r>
-              <a:rPr sz="2700" b="1" i="0">
+              <a:rPr sz="2800" b="1" i="0">
                 <a:solidFill>
                   <a:srgbClr val="1E2761"/>
                 </a:solidFill>
                 <a:latin typeface="Montserrat"/>
               </a:rPr>
-              <a:t>Regulador: grado 2 y válvula de máxima</a:t>
-            </a:r>
-          </a:p>
-        </p:txBody>
-      </p:sp>
-      <p:sp>
-        <p:nvSpPr>
-          <p:cNvPr id="7" name="TextBox 6"/>
+              <a:t>Ventilar el recinto es evitar una bolsa de gas</a:t>
+            </a:r>
+          </a:p>
+        </p:txBody>
+      </p:sp>
+      <p:sp>
+        <p:nvSpPr>
+          <p:cNvPr id="7" name="Rounded Rectangle 6"/>
+          <p:cNvSpPr/>
+          <p:nvPr/>
+        </p:nvSpPr>
+        <p:spPr>
+          <a:xfrm>
+            <a:off x="868680" y="1627632"/>
+            <a:ext cx="2011680" cy="73152"/>
+          </a:xfrm>
+          <a:prstGeom prst="roundRect">
+            <a:avLst/>
+          </a:prstGeom>
+          <a:solidFill>
+            <a:srgbClr val="E8801A"/>
+          </a:solidFill>
+          <a:ln>
+            <a:noFill/>
+          </a:ln>
+          <a:effectLst/>
+        </p:spPr>
+        <p:style>
+          <a:lnRef idx="1">
+            <a:schemeClr val="accent1"/>
+          </a:lnRef>
+          <a:fillRef idx="3">
+            <a:schemeClr val="accent1"/>
+          </a:fillRef>
+          <a:effectRef idx="2">
+            <a:schemeClr val="accent1"/>
+          </a:effectRef>
+          <a:fontRef idx="minor">
+            <a:schemeClr val="lt1"/>
+          </a:fontRef>
+        </p:style>
+        <p:txBody>
+          <a:bodyPr rtlCol="0" anchor="ctr"/>
+          <a:lstStyle/>
+          <a:p>
+            <a:pPr algn="ctr"/>
+          </a:p>
+        </p:txBody>
+      </p:sp>
+      <p:sp>
+        <p:nvSpPr>
+          <p:cNvPr id="8" name="TextBox 7"/>
           <p:cNvSpPr txBox="1"/>
           <p:nvPr/>
         </p:nvSpPr>
         <p:spPr>
           <a:xfrm>
-            <a:off x="822960" y="1920240"/>
+            <a:off x="822960" y="1965960"/>
             <a:ext cx="4983480" cy="4206240"/>
           </a:xfrm>
           <a:prstGeom prst="rect">
@@ -10807,17 +12069,17 @@
           <a:p>
             <a:pPr>
               <a:spcAft>
-                <a:spcPts val="1000"/>
+                <a:spcPts val="1100"/>
               </a:spcAft>
             </a:pPr>
             <a:r>
               <a:rPr sz="1600" b="1" i="0">
                 <a:solidFill>
-                  <a:srgbClr val="2E3A80"/>
-                </a:solidFill>
-                <a:latin typeface="Montserrat"/>
-              </a:rPr>
-              <a:t>•  </a:t>
+                  <a:srgbClr val="E8801A"/>
+                </a:solidFill>
+                <a:latin typeface="Montserrat"/>
+              </a:rPr>
+              <a:t>▸  </a:t>
             </a:r>
             <a:r>
               <a:rPr sz="1600" b="0" i="0">
@@ -10826,23 +12088,23 @@
                 </a:solidFill>
                 <a:latin typeface="Montserrat"/>
               </a:rPr>
-              <a:t>Regulación grado 2, dentro del recinto</a:t>
+              <a:t>Armarios: 5–50 cm², sin indirecta</a:t>
             </a:r>
           </a:p>
           <a:p>
             <a:pPr>
               <a:spcAft>
-                <a:spcPts val="1000"/>
+                <a:spcPts val="1100"/>
               </a:spcAft>
             </a:pPr>
             <a:r>
               <a:rPr sz="1600" b="1" i="0">
                 <a:solidFill>
-                  <a:srgbClr val="2E3A80"/>
-                </a:solidFill>
-                <a:latin typeface="Montserrat"/>
-              </a:rPr>
-              <a:t>•  </a:t>
+                  <a:srgbClr val="E8801A"/>
+                </a:solidFill>
+                <a:latin typeface="Montserrat"/>
+              </a:rPr>
+              <a:t>▸  </a:t>
             </a:r>
             <a:r>
               <a:rPr sz="1600" b="0" i="0">
@@ -10851,23 +12113,23 @@
                 </a:solidFill>
                 <a:latin typeface="Montserrat"/>
               </a:rPr>
-              <a:t>Recinto estanco, ventila al exterior</a:t>
+              <a:t>Locales y cuartos: 200/150 cm²</a:t>
             </a:r>
           </a:p>
           <a:p>
             <a:pPr>
               <a:spcAft>
-                <a:spcPts val="1000"/>
+                <a:spcPts val="1100"/>
               </a:spcAft>
             </a:pPr>
             <a:r>
               <a:rPr sz="1600" b="1" i="0">
                 <a:solidFill>
-                  <a:srgbClr val="2E3A80"/>
-                </a:solidFill>
-                <a:latin typeface="Montserrat"/>
-              </a:rPr>
-              <a:t>•  </a:t>
+                  <a:srgbClr val="E8801A"/>
+                </a:solidFill>
+                <a:latin typeface="Montserrat"/>
+              </a:rPr>
+              <a:t>▸  </a:t>
             </a:r>
             <a:r>
               <a:rPr sz="1600" b="0" i="0">
@@ -10876,23 +12138,23 @@
                 </a:solidFill>
                 <a:latin typeface="Montserrat"/>
               </a:rPr>
-              <a:t>Entrada ≥ 150 mbar → válvula de máxima</a:t>
+              <a:t>+50 % si el conducto es largo</a:t>
             </a:r>
           </a:p>
           <a:p>
             <a:pPr>
               <a:spcAft>
-                <a:spcPts val="1000"/>
+                <a:spcPts val="1100"/>
               </a:spcAft>
             </a:pPr>
             <a:r>
               <a:rPr sz="1600" b="1" i="0">
                 <a:solidFill>
-                  <a:srgbClr val="2E3A80"/>
-                </a:solidFill>
-                <a:latin typeface="Montserrat"/>
-              </a:rPr>
-              <a:t>•  </a:t>
+                  <a:srgbClr val="E8801A"/>
+                </a:solidFill>
+                <a:latin typeface="Montserrat"/>
+              </a:rPr>
+              <a:t>▸  </a:t>
             </a:r>
             <a:r>
               <a:rPr sz="1600" b="0" i="0">
@@ -10901,14 +12163,14 @@
                 </a:solidFill>
                 <a:latin typeface="Montserrat"/>
               </a:rPr>
-              <a:t>Regulador exterior: protegido de la lluvia</a:t>
-            </a:r>
-          </a:p>
-        </p:txBody>
-      </p:sp>
-      <p:sp>
-        <p:nvSpPr>
-          <p:cNvPr id="8" name="imgph" descr="IMGQ:gas pressure regulator on pipe"/>
+              <a:t>+50 % y puerta estanca en sótano</a:t>
+            </a:r>
+          </a:p>
+        </p:txBody>
+      </p:sp>
+      <p:sp>
+        <p:nvSpPr>
+          <p:cNvPr id="9" name="imgph" descr="IMGQ:wall ventilation grille louver metal"/>
           <p:cNvSpPr/>
           <p:nvPr/>
         </p:nvSpPr>
@@ -10954,7 +12216,7 @@
       </p:sp>
       <p:sp>
         <p:nvSpPr>
-          <p:cNvPr id="9" name="TextBox 8"/>
+          <p:cNvPr id="10" name="TextBox 9"/>
           <p:cNvSpPr txBox="1"/>
           <p:nvPr/>
         </p:nvSpPr>
@@ -10994,7 +12256,7 @@
                 </a:solidFill>
                 <a:latin typeface="Montserrat"/>
               </a:rPr>
-              <a:t>gas pressure regulator on pipe</a:t>
+              <a:t>wall ventilation grille louver metal</a:t>
             </a:r>
           </a:p>
         </p:txBody>

--- a/Curso Gas B/17 - Gas a la primera (guia practica NEDGIA)/17 - Gas a la primera (guia practica NEDGIA) - Vídeo 1.pptx
+++ b/Curso Gas B/17 - Gas a la primera (guia practica NEDGIA)/17 - Gas a la primera (guia practica NEDGIA) - Vídeo 1.pptx
@@ -827,12 +827,12 @@
           <a:lstStyle/>
           <a:p>
             <a:r>
-              <a:t>N1: De todos los recintos de la tabla, solo uno puede ventilar de forma indirecta, pasando antes por otro local. ¿Cuál es?</a:t>
-            </a:r>
-          </a:p>
-          <a:p>
-            <a:r>
-              <a:t>N2: Repasa la fila de la indirecta: casi todo pone «no se permite» menos una columna.</a:t>
+              <a:t>N1: Pregunta de tabla, la jugamos de oído. De todos los recintos de contadores, solo uno admite ventilación indirecta, o sea salir pasando antes por otro local. La pregunta: ¿cuál es? Opción A, el conducto técnico. Opción B, el armario exterior. Opción C, el local técnico. Opción D, el armario interior. Piensa cuál de los cuatro es la excepción.</a:t>
+            </a:r>
+          </a:p>
+          <a:p>
+            <a:r>
+              <a:t>N2: Pista: en la fila de la ventilación indirecta casi todo pone «no se permite» menos una columna.</a:t>
             </a:r>
           </a:p>
         </p:txBody>
@@ -902,12 +902,12 @@
           <a:lstStyle/>
           <a:p>
             <a:r>
-              <a:t>N1: ¿Por qué justo ese?</a:t>
-            </a:r>
-          </a:p>
-          <a:p>
-            <a:r>
-              <a:t>N2: Porque el conducto técnico es un hueco cerrado y estrecho por donde el aire ya circula; el resto, armarios y locales, tienen que soltar el aire directo al exterior para no llevar una posible fuga a otra estancia.</a:t>
+              <a:t>N2: La respuesta correcta es la opción A: el conducto técnico. Es el único que admite ventilación indirecta, porque es un hueco cerrado y estrecho por donde el aire ya circula de por sí. Los demás, armarios y locales, tienen que soltar el aire directo al exterior para no llevar una posible fuga a otra estancia. El truco: si dudas, quédate con que solo el conducto técnico se libra; el resto, directa sí o sí.</a:t>
+            </a:r>
+          </a:p>
+          <a:p>
+            <a:r>
+              <a:t>N1: Uno entre cuatro, y es el conducto técnico.</a:t>
             </a:r>
           </a:p>
         </p:txBody>
@@ -1727,12 +1727,12 @@
           <a:lstStyle/>
           <a:p>
             <a:r>
-              <a:t>N1: La llave de usuario es la que deja sin gas una vivienda concreta en una emergencia. ¿Con qué grado tiene que poder llegar a ella la distribuidora?</a:t>
-            </a:r>
-          </a:p>
-          <a:p>
-            <a:r>
-              <a:t>N2: Piensa que la compañía debe poder cortar desde la zona común aunque no haya nadie en casa: ni tan libre como el grado más bajo, ni tan difícil como el más alto.</a:t>
+              <a:t>N1: La llave de usuario es la que deja sin gas una vivienda concreta en una emergencia. Escucha la pregunta y las cuatro opciones. La pregunta: ¿con qué grado de accesibilidad tiene que quedar esa llave para la empresa distribuidora? Opción A, grado dos. Opción B, grado uno. Opción C, grado tres. Opción D, no exige grado. Piénsalo un momento.</a:t>
+            </a:r>
+          </a:p>
+          <a:p>
+            <a:r>
+              <a:t>N2: Pista: la compañía debe poder cortar desde la zona común aunque no haya nadie en casa; ni tan libre como el grado más bajo, ni tan difícil como el más alto.</a:t>
             </a:r>
           </a:p>
         </p:txBody>
@@ -1802,12 +1802,12 @@
           <a:lstStyle/>
           <a:p>
             <a:r>
-              <a:t>N1: ¿Por qué grado dos y no otro?</a:t>
-            </a:r>
-          </a:p>
-          <a:p>
-            <a:r>
-              <a:t>N2: Porque grado dos es cerradura normalizada sin escalera: la distribuidora abre con su llave desde la zona común y corta el gas. Si la dejaras dentro de la vivienda inaccesible, no podría cerrar en caso de peligro, y eso es anomalía.</a:t>
+              <a:t>N2: La respuesta correcta es la opción A: grado dos. Grado dos es cerradura normalizada pero sin escalera, así que la distribuidora abre con su llave desde la zona común o el límite de la propiedad y corta el gas. Si la dejaras dentro de la vivienda, inaccesible, la compañía no podría cerrar en caso de peligro, y eso es una anomalía. El truco: la llave de usuario se pone siempre, y para la distribuidora es grado dos.</a:t>
+            </a:r>
+          </a:p>
+          <a:p>
+            <a:r>
+              <a:t>N1: Grado dos: ni más libre ni más difícil.</a:t>
             </a:r>
           </a:p>
         </p:txBody>
@@ -2168,12 +2168,12 @@
           <a:lstStyle/>
           <a:p>
             <a:r>
-              <a:t>N1: Cuidado, que aquí caen dos alturas y mucha gente las cruza. ¿A qué altura como máximo va el totalizador dentro de la vivienda?</a:t>
-            </a:r>
-          </a:p>
-          <a:p>
-            <a:r>
-              <a:t>N2: Piensa quién lo lee: dentro de casa lo lee el propio usuario, de pie y sin subirse a nada.</a:t>
+              <a:t>N1: Atención, que esta cruza dos alturas y mucha gente las confunde. Escucha la pregunta y las cuatro opciones, que las jugamos solo de oído. La pregunta: ¿cuál es la altura máxima del totalizador cuando el contador va dentro de la vivienda? Opción A, un metro con setenta. Opción B, dos metros. Opción C, dos metros con cuarenta. Opción D, un metro con cincuenta. Si conduces, párala un momento y piensa tu respuesta.</a:t>
+            </a:r>
+          </a:p>
+          <a:p>
+            <a:r>
+              <a:t>N2: Una pista mientras lo decides: piensa quién lo lee. Dentro de casa lo lee el propio usuario, de pie y sin subirse a nada.</a:t>
             </a:r>
           </a:p>
         </p:txBody>
@@ -2243,12 +2243,12 @@
           <a:lstStyle/>
           <a:p>
             <a:r>
-              <a:t>N1: ¿Por qué un metro setenta y no dos metros?</a:t>
-            </a:r>
-          </a:p>
-          <a:p>
-            <a:r>
-              <a:t>N2: Porque en la vivienda no hay escalera de servicio; lo tiene que leer cómodamente el usuario. Truco para no fallar: centralizado dos metros, dos con cuarenta en prefabricado con escalera; en vivienda, uno setenta.</a:t>
+              <a:t>N2: La respuesta correcta es la opción A: un metro con setenta. Dentro de la vivienda no hay escalera de servicio, así que el totalizador lo tiene que leer cómodamente el usuario, y por eso no puede pasar de un metro con setenta. Los dos metros, y los dos con cuarenta del módulo prefabricado con escalera, son de la centralización. El truco para no fallar: centralizado dos metros, prefabricado dos con cuarenta con escalera; en vivienda, un metro con setenta.</a:t>
+            </a:r>
+          </a:p>
+          <a:p>
+            <a:r>
+              <a:t>N1: Dos alturas, dos escenarios; no los cruces.</a:t>
             </a:r>
           </a:p>
         </p:txBody>
